--- a/docs/AMKAD_Internship_Presentation.pptx
+++ b/docs/AMKAD_Internship_Presentation.pptx
@@ -3410,7 +3410,7 @@
                 </a:solidFill>
                 <a:latin typeface="Calibri"/>
               </a:rPr>
-              <a:t>From manual, invisible processes to a live dashboard and self-running data pipelines</a:t>
+              <a:t>Moving a few manual processes toward a live dashboard and pipelines that run on their own</a:t>
             </a:r>
           </a:p>
         </p:txBody>
@@ -3649,7 +3649,7 @@
                 </a:solidFill>
                 <a:latin typeface="Calibri"/>
               </a:rPr>
-              <a:t>What it actually took — and what I learned</a:t>
+              <a:t>What it took along the way, and what I learned</a:t>
             </a:r>
           </a:p>
         </p:txBody>
@@ -4051,7 +4051,7 @@
                 </a:solidFill>
                 <a:latin typeface="Calibri"/>
               </a:rPr>
-              <a:t>•  Landed on GitHub Actions — zero-friction, no cost</a:t>
+              <a:t>•  Landed on GitHub Actions, which worked cleanly and at no cost</a:t>
             </a:r>
           </a:p>
         </p:txBody>
@@ -6198,7 +6198,7 @@
                 </a:solidFill>
                 <a:latin typeface="Calibri"/>
               </a:rPr>
-              <a:t>•  Expand the SOA framework to the remaining customers and countries — the reusable engine is already built.</a:t>
+              <a:t>•  Extend the SOA framework to more customers and countries, since the reusable engine is already in place.</a:t>
             </a:r>
           </a:p>
           <a:p>
@@ -6214,7 +6214,7 @@
                 </a:solidFill>
                 <a:latin typeface="Calibri"/>
               </a:rPr>
-              <a:t>•  Migrate the data layer to a centralized database (SQL / Data Factory) — the scalable backbone for everything above.</a:t>
+              <a:t>•  Move the data layer toward a centralized database (SQL and Data Factory), which would be a stronger backbone for everything above.</a:t>
             </a:r>
           </a:p>
           <a:p>
@@ -6230,7 +6230,7 @@
                 </a:solidFill>
                 <a:latin typeface="Calibri"/>
               </a:rPr>
-              <a:t>•  Publish leadership-facing Power BI dashboards on top of the same consolidated data.</a:t>
+              <a:t>•  Build leadership-facing Power BI dashboards on top of the same consolidated data.</a:t>
             </a:r>
           </a:p>
           <a:p>
@@ -6246,7 +6246,7 @@
                 </a:solidFill>
                 <a:latin typeface="Calibri"/>
               </a:rPr>
-              <a:t>•  Hardening: standardize the monthly folder naming and add optional alerting for missing / late source files.</a:t>
+              <a:t>•  Small hardening steps, like standardizing the monthly folder names and adding alerts for missing or late source files.</a:t>
             </a:r>
           </a:p>
         </p:txBody>
@@ -6513,7 +6513,7 @@
                 </a:solidFill>
                 <a:latin typeface="Calibri"/>
               </a:rPr>
-              <a:t>WHY ME</a:t>
+              <a:t>LOOKING AHEAD</a:t>
             </a:r>
           </a:p>
         </p:txBody>
@@ -6552,7 +6552,7 @@
                 </a:solidFill>
                 <a:latin typeface="Calibri"/>
               </a:rPr>
-              <a:t>I don't just spot automation opportunities — I ship them.</a:t>
+              <a:t>I have genuinely loved being part of this team.</a:t>
             </a:r>
           </a:p>
         </p:txBody>
@@ -6591,7 +6591,7 @@
                 </a:solidFill>
                 <a:latin typeface="Calibri"/>
               </a:rPr>
-              <a:t>•  Built net-new capability that didn't exist — and put it into production.</a:t>
+              <a:t>•  Thank you for the trust, the patience, and the chance to work on real problems that matter to the team.</a:t>
             </a:r>
           </a:p>
           <a:p>
@@ -6607,7 +6607,7 @@
                 </a:solidFill>
                 <a:latin typeface="Calibri"/>
               </a:rPr>
-              <a:t>•  Delivered quantifiable time back to the team (~210–360 hrs/yr) and cut real error &amp; key-person risk.</a:t>
+              <a:t>•  I learned an enormous amount here, from the AR and collections side of the business to the tools that support it.</a:t>
             </a:r>
           </a:p>
           <a:p>
@@ -6623,7 +6623,7 @@
                 </a:solidFill>
                 <a:latin typeface="Calibri"/>
               </a:rPr>
-              <a:t>•  Worked through ambiguity, a hosting blocker, a production incident, and dozens of technical dead-ends — and still shipped.</a:t>
+              <a:t>•  I am proud of what we built together, and I know there is more I could contribute with more time.</a:t>
             </a:r>
           </a:p>
           <a:p>
@@ -6639,7 +6639,7 @@
                 </a:solidFill>
                 <a:latin typeface="Calibri"/>
               </a:rPr>
-              <a:t>•  Left everything documented, tested, and running without me.</a:t>
+              <a:t>•  If the opportunity is there after I graduate, I would love to come back and keep building on this with you.</a:t>
             </a:r>
           </a:p>
         </p:txBody>
@@ -6724,7 +6724,7 @@
                 </a:solidFill>
                 <a:latin typeface="Calibri"/>
               </a:rPr>
-              <a:t>Give me the next problem — I'll ship the solution.</a:t>
+              <a:t>Thank you for a great experience. I hope this is the start, not the end.</a:t>
             </a:r>
           </a:p>
         </p:txBody>
@@ -6924,7 +6924,7 @@
                 </a:solidFill>
                 <a:latin typeface="Calibri"/>
               </a:rPr>
-              <a:t>Finance Intern, Controlling  ·  DHL Express Americas — Key Account Desk (AMKAD)</a:t>
+              <a:t>Finance Intern, Controlling  ·  DHL Express Americas, Key Account Desk (AMKAD)</a:t>
             </a:r>
           </a:p>
           <a:p>
@@ -6940,7 +6940,7 @@
                 </a:solidFill>
                 <a:latin typeface="Calibri"/>
               </a:rPr>
-              <a:t>Questions welcome.</a:t>
+              <a:t>I would be happy to answer any questions.</a:t>
             </a:r>
           </a:p>
         </p:txBody>
@@ -7129,7 +7129,7 @@
                 </a:solidFill>
                 <a:latin typeface="Calibri"/>
               </a:rPr>
-              <a:t>THE BOTTOM LINE</a:t>
+              <a:t>THE IMPACT</a:t>
             </a:r>
           </a:p>
         </p:txBody>
@@ -7212,7 +7212,7 @@
                 </a:solidFill>
                 <a:latin typeface="Calibri"/>
               </a:rPr>
-              <a:t>What this internship delivered</a:t>
+              <a:t>What the work added up to</a:t>
             </a:r>
           </a:p>
         </p:txBody>
@@ -7387,7 +7387,7 @@
                 </a:solidFill>
                 <a:latin typeface="Calibri"/>
               </a:rPr>
-              <a:t>~210 hrs</a:t>
+              <a:t>~275 hrs</a:t>
             </a:r>
           </a:p>
           <a:p>
@@ -7403,7 +7403,7 @@
                 </a:solidFill>
                 <a:latin typeface="Calibri"/>
               </a:rPr>
-              <a:t>Collector time recovered per year (conservative) — up to ~360 hrs</a:t>
+              <a:t>of team time given back each year, and likely more. A conservative estimate.</a:t>
             </a:r>
           </a:p>
         </p:txBody>
@@ -7550,7 +7550,7 @@
                 </a:solidFill>
                 <a:latin typeface="Calibri"/>
               </a:rPr>
-              <a:t>Recurring SOAs generated &amp; emailed automatically (Arrow ×5, Baker ×1)</a:t>
+              <a:t>statements now generated and emailed automatically (Arrow ×5, Baker ×1)</a:t>
             </a:r>
           </a:p>
         </p:txBody>
@@ -7697,7 +7697,7 @@
                 </a:solidFill>
                 <a:latin typeface="Calibri"/>
               </a:rPr>
-              <a:t>Live AR reporting capability that did not exist before</a:t>
+              <a:t>shared AR reporting view the team did not have in one place before</a:t>
             </a:r>
           </a:p>
         </p:txBody>
@@ -7730,13 +7730,13 @@
               </a:spcAft>
             </a:pPr>
             <a:r>
-              <a:rPr sz="1800" b="1" i="0">
+              <a:rPr sz="1700" b="1" i="0">
                 <a:solidFill>
                   <a:srgbClr val="A5040D"/>
                 </a:solidFill>
                 <a:latin typeface="Calibri"/>
               </a:rPr>
-              <a:t>≈ 5 to 9 full 40-hour work-weeks of collector time returned to actual collections — every year.</a:t>
+              <a:t>That is roughly 7 to 11 full work-weeks a year that collectors can spend on collections instead of manual reporting.</a:t>
             </a:r>
           </a:p>
         </p:txBody>
@@ -7775,7 +7775,7 @@
                 </a:solidFill>
                 <a:latin typeface="Calibri"/>
               </a:rPr>
-              <a:t>•  Built net-new AR visibility (aging, UAC, trends, what-if simulators) that leadership never had before.</a:t>
+              <a:t>•  Helped bring AR visibility together in one place: aging, UAC, trends, and what-if scenarios.</a:t>
             </a:r>
           </a:p>
           <a:p>
@@ -7791,7 +7791,7 @@
                 </a:solidFill>
                 <a:latin typeface="Calibri"/>
               </a:rPr>
-              <a:t>•  Automated the daily data file that feeds it — no one has to rebuild it by hand anymore.</a:t>
+              <a:t>•  Took the daily data file off someone's plate so it no longer has to be rebuilt by hand.</a:t>
             </a:r>
           </a:p>
           <a:p>
@@ -7807,7 +7807,7 @@
                 </a:solidFill>
                 <a:latin typeface="Calibri"/>
               </a:rPr>
-              <a:t>•  Removed a single-person dependency and the error risk that came with manual copy/paste.</a:t>
+              <a:t>•  Reduced the reliance on one person, and the small errors that manual copy and paste can introduce.</a:t>
             </a:r>
           </a:p>
         </p:txBody>
@@ -8221,7 +8221,7 @@
                 </a:solidFill>
                 <a:latin typeface="Calibri"/>
               </a:rPr>
-              <a:t>The manual, invisible starting point</a:t>
+              <a:t>The manual starting point</a:t>
             </a:r>
           </a:p>
         </p:txBody>
@@ -8313,7 +8313,7 @@
                 </a:solidFill>
                 <a:latin typeface="Calibri"/>
               </a:rPr>
-              <a:t>What I built</a:t>
+              <a:t>What I worked on</a:t>
             </a:r>
           </a:p>
           <a:p>
@@ -8437,7 +8437,7 @@
                 </a:solidFill>
                 <a:latin typeface="Calibri"/>
               </a:rPr>
-              <a:t>Hours saved — with the math shown</a:t>
+              <a:t>Time saved, with the math shown</a:t>
             </a:r>
           </a:p>
         </p:txBody>
@@ -8545,7 +8545,7 @@
                 </a:solidFill>
                 <a:latin typeface="Calibri"/>
               </a:rPr>
-              <a:t>Power BI, data, and production challenges</a:t>
+              <a:t>Power BI, data, and the challenges along the way</a:t>
             </a:r>
           </a:p>
         </p:txBody>
@@ -8653,7 +8653,7 @@
                 </a:solidFill>
                 <a:latin typeface="Calibri"/>
               </a:rPr>
-              <a:t>How this scales beyond me</a:t>
+              <a:t>How this can grow from here</a:t>
             </a:r>
           </a:p>
         </p:txBody>
@@ -9317,7 +9317,7 @@
                 </a:solidFill>
                 <a:latin typeface="Calibri"/>
               </a:rPr>
-              <a:t>•  Copy → paste → calculate → save-as, by hand</a:t>
+              <a:t>•  Copy, paste, calculate, and save a new file</a:t>
             </a:r>
           </a:p>
           <a:p>
@@ -9333,7 +9333,7 @@
                 </a:solidFill>
                 <a:latin typeface="Calibri"/>
               </a:rPr>
-              <a:t>•  ~15 min/day, and only one person knew the steps</a:t>
+              <a:t>•  Around 30 to 35 min a day, and mostly one person</a:t>
             </a:r>
           </a:p>
           <a:p>
@@ -9349,7 +9349,7 @@
                 </a:solidFill>
                 <a:latin typeface="Calibri"/>
               </a:rPr>
-              <a:t>•  Manual copy/paste → real error risk</a:t>
+              <a:t>•  Manual copy and paste can introduce small errors</a:t>
             </a:r>
           </a:p>
         </p:txBody>
@@ -9723,7 +9723,7 @@
                 </a:solidFill>
                 <a:latin typeface="Calibri"/>
               </a:rPr>
-              <a:t>WHAT I BUILT</a:t>
+              <a:t>WHAT I WORKED ON</a:t>
             </a:r>
           </a:p>
         </p:txBody>
@@ -9806,7 +9806,7 @@
                 </a:solidFill>
                 <a:latin typeface="Calibri"/>
               </a:rPr>
-              <a:t>Three connected automations — one AR workflow, digitized</a:t>
+              <a:t>Three connected automations across the AR workflow</a:t>
             </a:r>
           </a:p>
         </p:txBody>
@@ -10029,7 +10029,7 @@
                 </a:solidFill>
                 <a:latin typeface="Calibri"/>
               </a:rPr>
-              <a:t>•  Drill-downs + what-if payment simulators</a:t>
+              <a:t>•  Drill-downs and what-if payment simulators</a:t>
             </a:r>
           </a:p>
           <a:p>
@@ -10045,7 +10045,7 @@
                 </a:solidFill>
                 <a:latin typeface="Calibri"/>
               </a:rPr>
-              <a:t>•  New visibility that didn't exist before</a:t>
+              <a:t>•  Visibility we did not have in one place</a:t>
             </a:r>
           </a:p>
         </p:txBody>
@@ -10208,7 +10208,7 @@
                 </a:solidFill>
                 <a:latin typeface="Calibri"/>
               </a:rPr>
-              <a:t>•  Source file lands → data extracted &amp; appended</a:t>
+              <a:t>•  Source file lands, data is extracted and added</a:t>
             </a:r>
           </a:p>
           <a:p>
@@ -10240,7 +10240,7 @@
                 </a:solidFill>
                 <a:latin typeface="Calibri"/>
               </a:rPr>
-              <a:t>•  Runs hands-off, every business day</a:t>
+              <a:t>•  Runs on its own, every business day</a:t>
             </a:r>
           </a:p>
         </p:txBody>
@@ -10387,7 +10387,7 @@
                 </a:solidFill>
                 <a:latin typeface="Calibri"/>
               </a:rPr>
-              <a:t>•  6 weekly statements auto-generated</a:t>
+              <a:t>•  6 weekly statements generated automatically</a:t>
             </a:r>
           </a:p>
           <a:p>
@@ -10403,7 +10403,7 @@
                 </a:solidFill>
                 <a:latin typeface="Calibri"/>
               </a:rPr>
-              <a:t>•  Auto-emailed with attachments &amp; CCs</a:t>
+              <a:t>•  Emailed with attachments and stakeholders CC'd</a:t>
             </a:r>
           </a:p>
           <a:p>
@@ -10419,7 +10419,7 @@
                 </a:solidFill>
                 <a:latin typeface="Calibri"/>
               </a:rPr>
-              <a:t>•  Configurable framework, not one-offs</a:t>
+              <a:t>•  A configurable framework, not one-offs</a:t>
             </a:r>
           </a:p>
           <a:p>
@@ -10435,7 +10435,7 @@
                 </a:solidFill>
                 <a:latin typeface="Calibri"/>
               </a:rPr>
-              <a:t>•  Collectors handle exceptions only</a:t>
+              <a:t>•  Collectors step in only for exceptions</a:t>
             </a:r>
           </a:p>
         </p:txBody>
@@ -10697,7 +10697,7 @@
                 </a:solidFill>
                 <a:latin typeface="Calibri"/>
               </a:rPr>
-              <a:t>A live view of the receivables book — built from nothing</a:t>
+              <a:t>A live view of the receivables book that we did not have before</a:t>
             </a:r>
           </a:p>
         </p:txBody>
@@ -10780,7 +10780,7 @@
                 </a:solidFill>
                 <a:latin typeface="Calibri"/>
               </a:rPr>
-              <a:t>•  Portfolio KPIs: Total AR, Overdue %, GT60 / GT90 aging, UAC, gross sales, payments.</a:t>
+              <a:t>•  Portfolio KPIs: Total AR, Overdue %, GT60 and GT90 aging, UAC, gross sales, payments.</a:t>
             </a:r>
           </a:p>
           <a:p>
@@ -10796,7 +10796,7 @@
                 </a:solidFill>
                 <a:latin typeface="Calibri"/>
               </a:rPr>
-              <a:t>•  Drill-downs both ways — country ↔ customer — to see what's driving every number.</a:t>
+              <a:t>•  Drill-downs both ways, from country to customer, to see what is driving each number.</a:t>
             </a:r>
           </a:p>
           <a:p>
@@ -10828,7 +10828,7 @@
                 </a:solidFill>
                 <a:latin typeface="Calibri"/>
               </a:rPr>
-              <a:t>•  What-if payment simulators: portfolio-level and customer-level, with manual allocation across aging bands and UAC.</a:t>
+              <a:t>•  What-if payment simulators, at portfolio and customer level, with manual allocation across aging bands and UAC.</a:t>
             </a:r>
           </a:p>
           <a:p>
@@ -10844,7 +10844,7 @@
                 </a:solidFill>
                 <a:latin typeface="Calibri"/>
               </a:rPr>
-              <a:t>•  Editable risk thresholds and an Action-Required list mapped to the collections escalation process.</a:t>
+              <a:t>•  Editable risk thresholds and an Action-Required list that follows the collections escalation process.</a:t>
             </a:r>
           </a:p>
         </p:txBody>
@@ -10931,7 +10931,7 @@
                 </a:solidFill>
                 <a:latin typeface="Calibri"/>
               </a:rPr>
-              <a:t>Why it matters:  this reporting did not exist before — I created the visibility, not just automated an existing report.</a:t>
+              <a:t>It replaced the report tab that used to be updated by hand each day, and brought AR visibility together in one place that the team did not have before.</a:t>
             </a:r>
           </a:p>
         </p:txBody>
@@ -11276,7 +11276,7 @@
                 </a:solidFill>
                 <a:latin typeface="Calibri"/>
               </a:rPr>
-              <a:t>BEFORE  —  ~15 min/day, one person</a:t>
+              <a:t>Before:  around 30 to 35 min a day, by hand</a:t>
             </a:r>
           </a:p>
         </p:txBody>
@@ -11315,7 +11315,7 @@
                 </a:solidFill>
                 <a:latin typeface="Calibri"/>
               </a:rPr>
-              <a:t>•  Open the emailed report, copy the data</a:t>
+              <a:t>•  Open the emailed report and copy the data</a:t>
             </a:r>
           </a:p>
           <a:p>
@@ -11331,7 +11331,7 @@
                 </a:solidFill>
                 <a:latin typeface="Calibri"/>
               </a:rPr>
-              <a:t>•  Paste into a template, calculate</a:t>
+              <a:t>•  Paste into a template and calculate</a:t>
             </a:r>
           </a:p>
           <a:p>
@@ -11363,7 +11363,7 @@
                 </a:solidFill>
                 <a:latin typeface="Calibri"/>
               </a:rPr>
-              <a:t>•  Refresh, then Save-As a new dated file</a:t>
+              <a:t>•  Update the report tab, then save a new file</a:t>
             </a:r>
           </a:p>
         </p:txBody>
@@ -11402,7 +11402,7 @@
                 </a:solidFill>
                 <a:latin typeface="Calibri"/>
               </a:rPr>
-              <a:t>AFTER  —  hands-off</a:t>
+              <a:t>After:  it runs on its own</a:t>
             </a:r>
           </a:p>
         </p:txBody>
@@ -11441,7 +11441,7 @@
                 </a:solidFill>
                 <a:latin typeface="Calibri"/>
               </a:rPr>
-              <a:t>•  File lands in the shared folder → flow fires</a:t>
+              <a:t>•  The file lands in the shared folder and the flow starts</a:t>
             </a:r>
           </a:p>
           <a:p>
@@ -11457,7 +11457,7 @@
                 </a:solidFill>
                 <a:latin typeface="Calibri"/>
               </a:rPr>
-              <a:t>•  Office Script reads &amp; maps today's rows</a:t>
+              <a:t>•  An Office Script reads and maps today's rows</a:t>
             </a:r>
           </a:p>
           <a:p>
@@ -11473,7 +11473,7 @@
                 </a:solidFill>
                 <a:latin typeface="Calibri"/>
               </a:rPr>
-              <a:t>•  New dated file built, carrying full history</a:t>
+              <a:t>•  A new dated file is built, carrying full history</a:t>
             </a:r>
           </a:p>
           <a:p>
@@ -11489,7 +11489,7 @@
                 </a:solidFill>
                 <a:latin typeface="Calibri"/>
               </a:rPr>
-              <a:t>•  Today's rows appended → dashboard updates</a:t>
+              <a:t>•  Today's rows are added and the dashboard updates</a:t>
             </a:r>
           </a:p>
         </p:txBody>
@@ -11574,7 +11574,7 @@
                 </a:solidFill>
                 <a:latin typeface="Calibri"/>
               </a:rPr>
-              <a:t>Built with:  Power Query (M)  ·  Office Scripts (TypeScript)  ·  Power Automate  ·  SharePoint</a:t>
+              <a:t>Built with  Power Query (M),  Office Scripts (TypeScript),  Power Automate,  and SharePoint</a:t>
             </a:r>
           </a:p>
           <a:p>
@@ -11590,7 +11590,7 @@
                 </a:solidFill>
                 <a:latin typeface="Calibri"/>
               </a:rPr>
-              <a:t>Includes duplicate protection and graceful handling of missing / incomplete data (e.g. month-start EUR gaps).</a:t>
+              <a:t>It also protects against duplicates and handles missing or incomplete data gracefully, such as month-start EUR gaps.</a:t>
             </a:r>
           </a:p>
         </p:txBody>
@@ -11935,7 +11935,7 @@
                 </a:solidFill>
                 <a:latin typeface="Calibri"/>
               </a:rPr>
-              <a:t>•  Automated 6 recurring weekly Statements of Account:  Arrow Electronics (5 countries) + Baker Hughes (1).</a:t>
+              <a:t>•  Automated 6 recurring weekly Statements of Account: Arrow Electronics across 5 countries, and Baker Hughes.</a:t>
             </a:r>
           </a:p>
           <a:p>
@@ -11951,7 +11951,7 @@
                 </a:solidFill>
                 <a:latin typeface="Calibri"/>
               </a:rPr>
-              <a:t>•  Auto-generated from START templates with the correct account filters, then auto-emailed — attachments included, internal stakeholders CC'd.</a:t>
+              <a:t>•  Generated from START templates with the right account filters, then emailed automatically with attachments and internal stakeholders CC'd.</a:t>
             </a:r>
           </a:p>
           <a:p>
@@ -11967,7 +11967,7 @@
                 </a:solidFill>
                 <a:latin typeface="Calibri"/>
               </a:rPr>
-              <a:t>•  Built as a configurable framework: new customers onboard by updating configuration (accounts, recipients, schedule, template), not by rebuilding the solution.</a:t>
+              <a:t>•  Built as a configurable framework, so new customers can be added by updating configuration (accounts, recipients, schedule, template) rather than rebuilding it.</a:t>
             </a:r>
           </a:p>
           <a:p>
@@ -11983,7 +11983,7 @@
                 </a:solidFill>
                 <a:latin typeface="Calibri"/>
               </a:rPr>
-              <a:t>•  Exception-based by design — collectors step in only for exceptions, and spend their time on collections instead of routine report generation.</a:t>
+              <a:t>•  Designed so collectors only step in for exceptions, and can spend more of their time on collections.</a:t>
             </a:r>
           </a:p>
         </p:txBody>
@@ -12070,7 +12070,7 @@
                 </a:solidFill>
                 <a:latin typeface="Calibri"/>
               </a:rPr>
-              <a:t>Honest scope:  2 customers live today (6 SOAs/week) on a framework designed to scale to the rest — the hard part (the reusable engine) is done.</a:t>
+              <a:t>To be clear on scope: two customers are live today, six SOAs a week, on a framework built so more can be added over time. The reusable engine is the part that is done.</a:t>
             </a:r>
           </a:p>
         </p:txBody>
@@ -12332,7 +12332,7 @@
                 </a:solidFill>
                 <a:latin typeface="Calibri"/>
               </a:rPr>
-              <a:t>Hours saved — with the math shown, conservatively</a:t>
+              <a:t>Time saved, with the math shown, kept deliberately conservative</a:t>
             </a:r>
           </a:p>
         </p:txBody>
@@ -12389,8 +12389,8 @@
         </p:nvSpPr>
         <p:spPr>
           <a:xfrm>
-            <a:off x="640080" y="2240280"/>
-            <a:ext cx="10881360" cy="658368"/>
+            <a:off x="640080" y="2194560"/>
+            <a:ext cx="10881360" cy="548640"/>
           </a:xfrm>
           <a:prstGeom prst="rect">
             <a:avLst/>
@@ -12433,8 +12433,8 @@
         </p:nvSpPr>
         <p:spPr>
           <a:xfrm>
-            <a:off x="777240" y="2240280"/>
-            <a:ext cx="4297680" cy="658368"/>
+            <a:off x="777240" y="2194560"/>
+            <a:ext cx="4297680" cy="548640"/>
           </a:xfrm>
           <a:prstGeom prst="rect">
             <a:avLst/>
@@ -12472,8 +12472,8 @@
         </p:nvSpPr>
         <p:spPr>
           <a:xfrm>
-            <a:off x="5349240" y="2240280"/>
-            <a:ext cx="1828800" cy="658368"/>
+            <a:off x="5349240" y="2194560"/>
+            <a:ext cx="1828800" cy="548640"/>
           </a:xfrm>
           <a:prstGeom prst="rect">
             <a:avLst/>
@@ -12511,8 +12511,8 @@
         </p:nvSpPr>
         <p:spPr>
           <a:xfrm>
-            <a:off x="7452360" y="2240280"/>
-            <a:ext cx="1828800" cy="658368"/>
+            <a:off x="7452360" y="2194560"/>
+            <a:ext cx="1828800" cy="548640"/>
           </a:xfrm>
           <a:prstGeom prst="rect">
             <a:avLst/>
@@ -12550,8 +12550,8 @@
         </p:nvSpPr>
         <p:spPr>
           <a:xfrm>
-            <a:off x="9555480" y="2240280"/>
-            <a:ext cx="1828800" cy="658368"/>
+            <a:off x="9555480" y="2194560"/>
+            <a:ext cx="1828800" cy="548640"/>
           </a:xfrm>
           <a:prstGeom prst="rect">
             <a:avLst/>
@@ -12589,8 +12589,8 @@
         </p:nvSpPr>
         <p:spPr>
           <a:xfrm>
-            <a:off x="640080" y="2898648"/>
-            <a:ext cx="10881360" cy="658368"/>
+            <a:off x="640080" y="2743200"/>
+            <a:ext cx="10881360" cy="548640"/>
           </a:xfrm>
           <a:prstGeom prst="rect">
             <a:avLst/>
@@ -12635,8 +12635,8 @@
         </p:nvSpPr>
         <p:spPr>
           <a:xfrm>
-            <a:off x="777240" y="2898648"/>
-            <a:ext cx="4297680" cy="658368"/>
+            <a:off x="777240" y="2743200"/>
+            <a:ext cx="4297680" cy="548640"/>
           </a:xfrm>
           <a:prstGeom prst="rect">
             <a:avLst/>
@@ -12661,7 +12661,7 @@
                 </a:solidFill>
                 <a:latin typeface="Calibri"/>
               </a:rPr>
-              <a:t>Daily data pipeline  (15 min × 5 days)</a:t>
+              <a:t>Daily data file  (15 min × 5 days)</a:t>
             </a:r>
           </a:p>
         </p:txBody>
@@ -12674,8 +12674,8 @@
         </p:nvSpPr>
         <p:spPr>
           <a:xfrm>
-            <a:off x="5349240" y="2898648"/>
-            <a:ext cx="1828800" cy="658368"/>
+            <a:off x="5349240" y="2743200"/>
+            <a:ext cx="1828800" cy="548640"/>
           </a:xfrm>
           <a:prstGeom prst="rect">
             <a:avLst/>
@@ -12713,8 +12713,8 @@
         </p:nvSpPr>
         <p:spPr>
           <a:xfrm>
-            <a:off x="7452360" y="2898648"/>
-            <a:ext cx="1828800" cy="658368"/>
+            <a:off x="7452360" y="2743200"/>
+            <a:ext cx="1828800" cy="548640"/>
           </a:xfrm>
           <a:prstGeom prst="rect">
             <a:avLst/>
@@ -12752,8 +12752,8 @@
         </p:nvSpPr>
         <p:spPr>
           <a:xfrm>
-            <a:off x="9555480" y="2898648"/>
-            <a:ext cx="1828800" cy="658368"/>
+            <a:off x="9555480" y="2743200"/>
+            <a:ext cx="1828800" cy="548640"/>
           </a:xfrm>
           <a:prstGeom prst="rect">
             <a:avLst/>
@@ -12791,8 +12791,8 @@
         </p:nvSpPr>
         <p:spPr>
           <a:xfrm>
-            <a:off x="640080" y="3557016"/>
-            <a:ext cx="10881360" cy="658368"/>
+            <a:off x="640080" y="3291840"/>
+            <a:ext cx="10881360" cy="548640"/>
           </a:xfrm>
           <a:prstGeom prst="rect">
             <a:avLst/>
@@ -12837,8 +12837,8 @@
         </p:nvSpPr>
         <p:spPr>
           <a:xfrm>
-            <a:off x="777240" y="3557016"/>
-            <a:ext cx="4297680" cy="658368"/>
+            <a:off x="777240" y="3291840"/>
+            <a:ext cx="4297680" cy="548640"/>
           </a:xfrm>
           <a:prstGeom prst="rect">
             <a:avLst/>
@@ -12863,7 +12863,7 @@
                 </a:solidFill>
                 <a:latin typeface="Calibri"/>
               </a:rPr>
-              <a:t>SOA automation  (6 SOAs × 30–60 min)</a:t>
+              <a:t>Daily report tab  (15–20 min × 5 days)</a:t>
             </a:r>
           </a:p>
         </p:txBody>
@@ -12876,8 +12876,8 @@
         </p:nvSpPr>
         <p:spPr>
           <a:xfrm>
-            <a:off x="5349240" y="3557016"/>
-            <a:ext cx="1828800" cy="658368"/>
+            <a:off x="5349240" y="3291840"/>
+            <a:ext cx="1828800" cy="548640"/>
           </a:xfrm>
           <a:prstGeom prst="rect">
             <a:avLst/>
@@ -12902,7 +12902,7 @@
                 </a:solidFill>
                 <a:latin typeface="Calibri"/>
               </a:rPr>
-              <a:t>3–6 hrs</a:t>
+              <a:t>1.25–1.7 hrs</a:t>
             </a:r>
           </a:p>
         </p:txBody>
@@ -12915,8 +12915,8 @@
         </p:nvSpPr>
         <p:spPr>
           <a:xfrm>
-            <a:off x="7452360" y="3557016"/>
-            <a:ext cx="1828800" cy="658368"/>
+            <a:off x="7452360" y="3291840"/>
+            <a:ext cx="1828800" cy="548640"/>
           </a:xfrm>
           <a:prstGeom prst="rect">
             <a:avLst/>
@@ -12941,7 +12941,7 @@
                 </a:solidFill>
                 <a:latin typeface="Calibri"/>
               </a:rPr>
-              <a:t>13–26 hrs</a:t>
+              <a:t>~5–7 hrs</a:t>
             </a:r>
           </a:p>
         </p:txBody>
@@ -12954,8 +12954,8 @@
         </p:nvSpPr>
         <p:spPr>
           <a:xfrm>
-            <a:off x="9555480" y="3557016"/>
-            <a:ext cx="1828800" cy="658368"/>
+            <a:off x="9555480" y="3291840"/>
+            <a:ext cx="1828800" cy="548640"/>
           </a:xfrm>
           <a:prstGeom prst="rect">
             <a:avLst/>
@@ -12980,7 +12980,7 @@
                 </a:solidFill>
                 <a:latin typeface="Calibri"/>
               </a:rPr>
-              <a:t>150–300 hrs</a:t>
+              <a:t>~63–83 hrs</a:t>
             </a:r>
           </a:p>
         </p:txBody>
@@ -12993,8 +12993,210 @@
         </p:nvSpPr>
         <p:spPr>
           <a:xfrm>
-            <a:off x="640080" y="4215384"/>
-            <a:ext cx="10881360" cy="658368"/>
+            <a:off x="640080" y="3840480"/>
+            <a:ext cx="10881360" cy="548640"/>
+          </a:xfrm>
+          <a:prstGeom prst="rect">
+            <a:avLst/>
+          </a:prstGeom>
+          <a:solidFill>
+            <a:srgbClr val="FFFFFF"/>
+          </a:solidFill>
+          <a:ln w="9525">
+            <a:solidFill>
+              <a:srgbClr val="E2E0DA"/>
+            </a:solidFill>
+          </a:ln>
+          <a:effectLst/>
+        </p:spPr>
+        <p:style>
+          <a:lnRef idx="1">
+            <a:schemeClr val="accent1"/>
+          </a:lnRef>
+          <a:fillRef idx="3">
+            <a:schemeClr val="accent1"/>
+          </a:fillRef>
+          <a:effectRef idx="2">
+            <a:schemeClr val="accent1"/>
+          </a:effectRef>
+          <a:fontRef idx="minor">
+            <a:schemeClr val="lt1"/>
+          </a:fontRef>
+        </p:style>
+        <p:txBody>
+          <a:bodyPr rtlCol="0" anchor="ctr"/>
+          <a:lstStyle/>
+          <a:p>
+            <a:pPr algn="ctr"/>
+          </a:p>
+        </p:txBody>
+      </p:sp>
+      <p:sp>
+        <p:nvSpPr>
+          <p:cNvPr id="23" name="TextBox 22"/>
+          <p:cNvSpPr txBox="1"/>
+          <p:nvPr/>
+        </p:nvSpPr>
+        <p:spPr>
+          <a:xfrm>
+            <a:off x="777240" y="3840480"/>
+            <a:ext cx="4297680" cy="548640"/>
+          </a:xfrm>
+          <a:prstGeom prst="rect">
+            <a:avLst/>
+          </a:prstGeom>
+          <a:noFill/>
+        </p:spPr>
+        <p:txBody>
+          <a:bodyPr wrap="square" anchor="ctr" lIns="0" rIns="0" tIns="0" bIns="0">
+            <a:spAutoFit/>
+          </a:bodyPr>
+          <a:lstStyle/>
+          <a:p>
+            <a:pPr algn="l">
+              <a:spcAft>
+                <a:spcPts val="600"/>
+              </a:spcAft>
+            </a:pPr>
+            <a:r>
+              <a:rPr sz="1300" b="1" i="0">
+                <a:solidFill>
+                  <a:srgbClr val="1A1D21"/>
+                </a:solidFill>
+                <a:latin typeface="Calibri"/>
+              </a:rPr>
+              <a:t>SOA automation  (6 SOAs × 30–60 min)</a:t>
+            </a:r>
+          </a:p>
+        </p:txBody>
+      </p:sp>
+      <p:sp>
+        <p:nvSpPr>
+          <p:cNvPr id="24" name="TextBox 23"/>
+          <p:cNvSpPr txBox="1"/>
+          <p:nvPr/>
+        </p:nvSpPr>
+        <p:spPr>
+          <a:xfrm>
+            <a:off x="5349240" y="3840480"/>
+            <a:ext cx="1828800" cy="548640"/>
+          </a:xfrm>
+          <a:prstGeom prst="rect">
+            <a:avLst/>
+          </a:prstGeom>
+          <a:noFill/>
+        </p:spPr>
+        <p:txBody>
+          <a:bodyPr wrap="square" anchor="ctr" lIns="0" rIns="0" tIns="0" bIns="0">
+            <a:spAutoFit/>
+          </a:bodyPr>
+          <a:lstStyle/>
+          <a:p>
+            <a:pPr algn="ctr">
+              <a:spcAft>
+                <a:spcPts val="600"/>
+              </a:spcAft>
+            </a:pPr>
+            <a:r>
+              <a:rPr sz="1300" b="0" i="0">
+                <a:solidFill>
+                  <a:srgbClr val="1A1D21"/>
+                </a:solidFill>
+                <a:latin typeface="Calibri"/>
+              </a:rPr>
+              <a:t>3–6 hrs</a:t>
+            </a:r>
+          </a:p>
+        </p:txBody>
+      </p:sp>
+      <p:sp>
+        <p:nvSpPr>
+          <p:cNvPr id="25" name="TextBox 24"/>
+          <p:cNvSpPr txBox="1"/>
+          <p:nvPr/>
+        </p:nvSpPr>
+        <p:spPr>
+          <a:xfrm>
+            <a:off x="7452360" y="3840480"/>
+            <a:ext cx="1828800" cy="548640"/>
+          </a:xfrm>
+          <a:prstGeom prst="rect">
+            <a:avLst/>
+          </a:prstGeom>
+          <a:noFill/>
+        </p:spPr>
+        <p:txBody>
+          <a:bodyPr wrap="square" anchor="ctr" lIns="0" rIns="0" tIns="0" bIns="0">
+            <a:spAutoFit/>
+          </a:bodyPr>
+          <a:lstStyle/>
+          <a:p>
+            <a:pPr algn="ctr">
+              <a:spcAft>
+                <a:spcPts val="600"/>
+              </a:spcAft>
+            </a:pPr>
+            <a:r>
+              <a:rPr sz="1300" b="0" i="0">
+                <a:solidFill>
+                  <a:srgbClr val="1A1D21"/>
+                </a:solidFill>
+                <a:latin typeface="Calibri"/>
+              </a:rPr>
+              <a:t>13–26 hrs</a:t>
+            </a:r>
+          </a:p>
+        </p:txBody>
+      </p:sp>
+      <p:sp>
+        <p:nvSpPr>
+          <p:cNvPr id="26" name="TextBox 25"/>
+          <p:cNvSpPr txBox="1"/>
+          <p:nvPr/>
+        </p:nvSpPr>
+        <p:spPr>
+          <a:xfrm>
+            <a:off x="9555480" y="3840480"/>
+            <a:ext cx="1828800" cy="548640"/>
+          </a:xfrm>
+          <a:prstGeom prst="rect">
+            <a:avLst/>
+          </a:prstGeom>
+          <a:noFill/>
+        </p:spPr>
+        <p:txBody>
+          <a:bodyPr wrap="square" anchor="ctr" lIns="0" rIns="0" tIns="0" bIns="0">
+            <a:spAutoFit/>
+          </a:bodyPr>
+          <a:lstStyle/>
+          <a:p>
+            <a:pPr algn="ctr">
+              <a:spcAft>
+                <a:spcPts val="600"/>
+              </a:spcAft>
+            </a:pPr>
+            <a:r>
+              <a:rPr sz="1300" b="0" i="0">
+                <a:solidFill>
+                  <a:srgbClr val="1A1D21"/>
+                </a:solidFill>
+                <a:latin typeface="Calibri"/>
+              </a:rPr>
+              <a:t>150–300 hrs</a:t>
+            </a:r>
+          </a:p>
+        </p:txBody>
+      </p:sp>
+      <p:sp>
+        <p:nvSpPr>
+          <p:cNvPr id="27" name="Rectangle 26"/>
+          <p:cNvSpPr/>
+          <p:nvPr/>
+        </p:nvSpPr>
+        <p:spPr>
+          <a:xfrm>
+            <a:off x="640080" y="4389120"/>
+            <a:ext cx="10881360" cy="548640"/>
           </a:xfrm>
           <a:prstGeom prst="rect">
             <a:avLst/>
@@ -13033,14 +13235,14 @@
       </p:sp>
       <p:sp>
         <p:nvSpPr>
-          <p:cNvPr id="23" name="Rectangle 22"/>
+          <p:cNvPr id="28" name="Rectangle 27"/>
           <p:cNvSpPr/>
           <p:nvPr/>
         </p:nvSpPr>
         <p:spPr>
           <a:xfrm>
-            <a:off x="640080" y="4215384"/>
-            <a:ext cx="50800" cy="658368"/>
+            <a:off x="640080" y="4389120"/>
+            <a:ext cx="50800" cy="548640"/>
           </a:xfrm>
           <a:prstGeom prst="rect">
             <a:avLst/>
@@ -13077,14 +13279,14 @@
       </p:sp>
       <p:sp>
         <p:nvSpPr>
-          <p:cNvPr id="24" name="TextBox 23"/>
+          <p:cNvPr id="29" name="TextBox 28"/>
           <p:cNvSpPr txBox="1"/>
           <p:nvPr/>
         </p:nvSpPr>
         <p:spPr>
           <a:xfrm>
-            <a:off x="777240" y="4215384"/>
-            <a:ext cx="4297680" cy="658368"/>
+            <a:off x="777240" y="4389120"/>
+            <a:ext cx="4297680" cy="548640"/>
           </a:xfrm>
           <a:prstGeom prst="rect">
             <a:avLst/>
@@ -13116,14 +13318,14 @@
       </p:sp>
       <p:sp>
         <p:nvSpPr>
-          <p:cNvPr id="25" name="TextBox 24"/>
+          <p:cNvPr id="30" name="TextBox 29"/>
           <p:cNvSpPr txBox="1"/>
           <p:nvPr/>
         </p:nvSpPr>
         <p:spPr>
           <a:xfrm>
-            <a:off x="5349240" y="4215384"/>
-            <a:ext cx="1828800" cy="658368"/>
+            <a:off x="5349240" y="4389120"/>
+            <a:ext cx="1828800" cy="548640"/>
           </a:xfrm>
           <a:prstGeom prst="rect">
             <a:avLst/>
@@ -13148,21 +13350,21 @@
                 </a:solidFill>
                 <a:latin typeface="Calibri"/>
               </a:rPr>
-              <a:t>~4–7 hrs</a:t>
-            </a:r>
-          </a:p>
-        </p:txBody>
-      </p:sp>
-      <p:sp>
-        <p:nvSpPr>
-          <p:cNvPr id="26" name="TextBox 25"/>
+              <a:t>~5.5–9 hrs</a:t>
+            </a:r>
+          </a:p>
+        </p:txBody>
+      </p:sp>
+      <p:sp>
+        <p:nvSpPr>
+          <p:cNvPr id="31" name="TextBox 30"/>
           <p:cNvSpPr txBox="1"/>
           <p:nvPr/>
         </p:nvSpPr>
         <p:spPr>
           <a:xfrm>
-            <a:off x="7452360" y="4215384"/>
-            <a:ext cx="1828800" cy="658368"/>
+            <a:off x="7452360" y="4389120"/>
+            <a:ext cx="1828800" cy="548640"/>
           </a:xfrm>
           <a:prstGeom prst="rect">
             <a:avLst/>
@@ -13187,21 +13389,21 @@
                 </a:solidFill>
                 <a:latin typeface="Calibri"/>
               </a:rPr>
-              <a:t>~18–31 hrs</a:t>
-            </a:r>
-          </a:p>
-        </p:txBody>
-      </p:sp>
-      <p:sp>
-        <p:nvSpPr>
-          <p:cNvPr id="27" name="TextBox 26"/>
+              <a:t>~24–38 hrs</a:t>
+            </a:r>
+          </a:p>
+        </p:txBody>
+      </p:sp>
+      <p:sp>
+        <p:nvSpPr>
+          <p:cNvPr id="32" name="TextBox 31"/>
           <p:cNvSpPr txBox="1"/>
           <p:nvPr/>
         </p:nvSpPr>
         <p:spPr>
           <a:xfrm>
-            <a:off x="9555480" y="4215384"/>
-            <a:ext cx="1828800" cy="658368"/>
+            <a:off x="9555480" y="4389120"/>
+            <a:ext cx="1828800" cy="548640"/>
           </a:xfrm>
           <a:prstGeom prst="rect">
             <a:avLst/>
@@ -13226,20 +13428,20 @@
                 </a:solidFill>
                 <a:latin typeface="Calibri"/>
               </a:rPr>
-              <a:t>~210–360 hrs</a:t>
-            </a:r>
-          </a:p>
-        </p:txBody>
-      </p:sp>
-      <p:sp>
-        <p:nvSpPr>
-          <p:cNvPr id="28" name="TextBox 27"/>
+              <a:t>~275–445 hrs</a:t>
+            </a:r>
+          </a:p>
+        </p:txBody>
+      </p:sp>
+      <p:sp>
+        <p:nvSpPr>
+          <p:cNvPr id="33" name="TextBox 32"/>
           <p:cNvSpPr txBox="1"/>
           <p:nvPr/>
         </p:nvSpPr>
         <p:spPr>
           <a:xfrm>
-            <a:off x="640080" y="5074920"/>
+            <a:off x="640080" y="5120640"/>
             <a:ext cx="10881360" cy="1188720"/>
           </a:xfrm>
           <a:prstGeom prst="rect">
@@ -13265,7 +13467,7 @@
                 </a:solidFill>
                 <a:latin typeface="Calibri"/>
               </a:rPr>
-              <a:t>≈ 5 to 9 full 40-hour work-weeks of collector time recovered per year.</a:t>
+              <a:t>That comes to roughly 7 to 11 full work-weeks of time given back to the team each year.</a:t>
             </a:r>
           </a:p>
           <a:p>
@@ -13281,14 +13483,14 @@
                 </a:solidFill>
                 <a:latin typeface="Calibri"/>
               </a:rPr>
-              <a:t>Assumptions (deliberately conservative):  5 business days/week; SOA at 30–60 min each, 6/week; figures EXCLUDE error-correction, rework, and downstream analysis time — which would push the number higher, not lower.</a:t>
-            </a:r>
-          </a:p>
-        </p:txBody>
-      </p:sp>
-      <p:sp>
-        <p:nvSpPr>
-          <p:cNvPr id="29" name="TextBox 28"/>
+              <a:t>The assumptions are kept conservative on purpose: 5 business days a week, SOAs at 30 to 60 minutes each, 6 a week. The figures leave out error-correction, rework, and analysis time, so the real number is likely higher.</a:t>
+            </a:r>
+          </a:p>
+        </p:txBody>
+      </p:sp>
+      <p:sp>
+        <p:nvSpPr>
+          <p:cNvPr id="34" name="TextBox 33"/>
           <p:cNvSpPr txBox="1"/>
           <p:nvPr/>
         </p:nvSpPr>
@@ -13327,7 +13529,7 @@
       </p:sp>
       <p:sp>
         <p:nvSpPr>
-          <p:cNvPr id="30" name="TextBox 29"/>
+          <p:cNvPr id="35" name="TextBox 34"/>
           <p:cNvSpPr txBox="1"/>
           <p:nvPr/>
         </p:nvSpPr>

--- a/docs/AMKAD_Internship_Presentation.pptx
+++ b/docs/AMKAD_Internship_Presentation.pptx
@@ -23,6 +23,8 @@
     <p:sldId id="271" r:id="rId22"/>
     <p:sldId id="272" r:id="rId23"/>
     <p:sldId id="273" r:id="rId24"/>
+    <p:sldId id="274" r:id="rId25"/>
+    <p:sldId id="275" r:id="rId26"/>
   </p:sldIdLst>
   <p:sldSz cx="12191695" cy="6858000" type="screen4x3"/>
   <p:notesSz cx="6858000" cy="9144000"/>
@@ -6930,7 +6932,7 @@
                 </a:solidFill>
                 <a:latin typeface="Calibri"/>
               </a:rPr>
-              <a:t>WHAT I LEARNED</a:t>
+              <a:t>THE BIGGER CHALLENGE WASN'T THE CODE</a:t>
             </a:r>
           </a:p>
         </p:txBody>
@@ -7013,7 +7015,7 @@
                 </a:solidFill>
                 <a:latin typeface="Calibri"/>
               </a:rPr>
-              <a:t>The parts that will stay with me</a:t>
+              <a:t>The hardest parts were the ones around the building</a:t>
             </a:r>
           </a:p>
         </p:txBody>
@@ -7070,7 +7072,7 @@
         </p:nvSpPr>
         <p:spPr>
           <a:xfrm>
-            <a:off x="640080" y="2286000"/>
+            <a:off x="640080" y="2240280"/>
             <a:ext cx="10881360" cy="4023360"/>
           </a:xfrm>
           <a:prstGeom prst="rect">
@@ -7086,81 +7088,81 @@
           <a:p>
             <a:pPr algn="l">
               <a:spcAft>
-                <a:spcPts val="1300"/>
-              </a:spcAft>
-            </a:pPr>
-            <a:r>
-              <a:rPr sz="1550" b="0" i="0">
+                <a:spcPts val="1200"/>
+              </a:spcAft>
+            </a:pPr>
+            <a:r>
+              <a:rPr sz="1500" b="0" i="0">
                 <a:solidFill>
                   <a:srgbClr val="1A1D21"/>
                 </a:solidFill>
                 <a:latin typeface="Calibri"/>
               </a:rPr>
-              <a:t>•  How accounts receivable connects to the wider health and performance of the business.</a:t>
-            </a:r>
-          </a:p>
-          <a:p>
-            <a:pPr algn="l">
-              <a:spcAft>
-                <a:spcPts val="1300"/>
-              </a:spcAft>
-            </a:pPr>
-            <a:r>
-              <a:rPr sz="1550" b="0" i="0">
+              <a:t>•  Learning the business first: AR, aging, UAC, DSO, SOAs, START, and the AMKAD workflows, before automating any of it.</a:t>
+            </a:r>
+          </a:p>
+          <a:p>
+            <a:pPr algn="l">
+              <a:spcAft>
+                <a:spcPts val="1200"/>
+              </a:spcAft>
+            </a:pPr>
+            <a:r>
+              <a:rPr sz="1500" b="0" i="0">
                 <a:solidFill>
                   <a:srgbClr val="1A1D21"/>
                 </a:solidFill>
                 <a:latin typeface="Calibri"/>
               </a:rPr>
-              <a:t>•  How to take a business problem and turn it into a practical automation opportunity.</a:t>
-            </a:r>
-          </a:p>
-          <a:p>
-            <a:pPr algn="l">
-              <a:spcAft>
-                <a:spcPts val="1300"/>
-              </a:spcAft>
-            </a:pPr>
-            <a:r>
-              <a:rPr sz="1550" b="0" i="0">
+              <a:t>•  Understanding why collectors did each step, what the exceptions were, and what could break if I got it wrong.</a:t>
+            </a:r>
+          </a:p>
+          <a:p>
+            <a:pPr algn="l">
+              <a:spcAft>
+                <a:spcPts val="1200"/>
+              </a:spcAft>
+            </a:pPr>
+            <a:r>
+              <a:rPr sz="1500" b="0" i="0">
                 <a:solidFill>
                   <a:srgbClr val="1A1D21"/>
                 </a:solidFill>
                 <a:latin typeface="Calibri"/>
               </a:rPr>
-              <a:t>•  How to work with people across finance, collections, and IT to get something built.</a:t>
-            </a:r>
-          </a:p>
-          <a:p>
-            <a:pPr algn="l">
-              <a:spcAft>
-                <a:spcPts val="1300"/>
-              </a:spcAft>
-            </a:pPr>
-            <a:r>
-              <a:rPr sz="1550" b="0" i="0">
+              <a:t>•  Making imperfect, fragmented data reliable: different files, SAP exports, missing values, and inconsistent naming.</a:t>
+            </a:r>
+          </a:p>
+          <a:p>
+            <a:pPr algn="l">
+              <a:spcAft>
+                <a:spcPts val="1200"/>
+              </a:spcAft>
+            </a:pPr>
+            <a:r>
+              <a:rPr sz="1500" b="0" i="0">
                 <a:solidFill>
                   <a:srgbClr val="1A1D21"/>
                 </a:solidFill>
                 <a:latin typeface="Calibri"/>
               </a:rPr>
-              <a:t>•  Why it is worth designing scalable, reusable solutions instead of one-off fixes.</a:t>
-            </a:r>
-          </a:p>
-          <a:p>
-            <a:pPr algn="l">
-              <a:spcAft>
-                <a:spcPts val="1300"/>
-              </a:spcAft>
-            </a:pPr>
-            <a:r>
-              <a:rPr sz="1550" b="0" i="0">
+              <a:t>•  Building systems people actually depend on, where accuracy and uptime matter, not demo projects.</a:t>
+            </a:r>
+          </a:p>
+          <a:p>
+            <a:pPr algn="l">
+              <a:spcAft>
+                <a:spcPts val="1200"/>
+              </a:spcAft>
+            </a:pPr>
+            <a:r>
+              <a:rPr sz="1500" b="0" i="0">
                 <a:solidFill>
                   <a:srgbClr val="1A1D21"/>
                 </a:solidFill>
                 <a:latin typeface="Calibri"/>
               </a:rPr>
-              <a:t>•  How to stay calm and methodical when something breaks, and recover from it properly.</a:t>
+              <a:t>•  Piecing together processes that were never fully documented, by meeting people, asking questions, and testing.</a:t>
             </a:r>
           </a:p>
         </p:txBody>
@@ -7339,7 +7341,7 @@
                 </a:solidFill>
                 <a:latin typeface="Calibri"/>
               </a:rPr>
-              <a:t>WHAT IT TOOK</a:t>
+              <a:t>WHAT I LEARNED</a:t>
             </a:r>
           </a:p>
         </p:txBody>
@@ -7422,7 +7424,7 @@
                 </a:solidFill>
                 <a:latin typeface="Calibri"/>
               </a:rPr>
-              <a:t>Skills I got to build and use</a:t>
+              <a:t>The parts that will stay with me</a:t>
             </a:r>
           </a:p>
         </p:txBody>
@@ -7473,106 +7475,14 @@
       </p:sp>
       <p:sp>
         <p:nvSpPr>
-          <p:cNvPr id="7" name="Rounded Rectangle 6"/>
-          <p:cNvSpPr/>
+          <p:cNvPr id="7" name="TextBox 6"/>
+          <p:cNvSpPr txBox="1"/>
           <p:nvPr/>
         </p:nvSpPr>
         <p:spPr>
           <a:xfrm>
             <a:off x="640080" y="2286000"/>
-            <a:ext cx="5349240" cy="1828800"/>
-          </a:xfrm>
-          <a:prstGeom prst="roundRect">
-            <a:avLst>
-              <a:gd name="adj" fmla="val 7000"/>
-            </a:avLst>
-          </a:prstGeom>
-          <a:solidFill>
-            <a:srgbClr val="FFFFFF"/>
-          </a:solidFill>
-          <a:ln w="9525">
-            <a:solidFill>
-              <a:srgbClr val="E2E0DA"/>
-            </a:solidFill>
-          </a:ln>
-          <a:effectLst/>
-        </p:spPr>
-        <p:style>
-          <a:lnRef idx="1">
-            <a:schemeClr val="accent1"/>
-          </a:lnRef>
-          <a:fillRef idx="3">
-            <a:schemeClr val="accent1"/>
-          </a:fillRef>
-          <a:effectRef idx="2">
-            <a:schemeClr val="accent1"/>
-          </a:effectRef>
-          <a:fontRef idx="minor">
-            <a:schemeClr val="lt1"/>
-          </a:fontRef>
-        </p:style>
-        <p:txBody>
-          <a:bodyPr rtlCol="0" anchor="ctr"/>
-          <a:lstStyle/>
-          <a:p>
-            <a:pPr algn="ctr"/>
-          </a:p>
-        </p:txBody>
-      </p:sp>
-      <p:sp>
-        <p:nvSpPr>
-          <p:cNvPr id="8" name="Rectangle 7"/>
-          <p:cNvSpPr/>
-          <p:nvPr/>
-        </p:nvSpPr>
-        <p:spPr>
-          <a:xfrm>
-            <a:off x="640080" y="2286000"/>
-            <a:ext cx="50800" cy="1828800"/>
-          </a:xfrm>
-          <a:prstGeom prst="rect">
-            <a:avLst/>
-          </a:prstGeom>
-          <a:solidFill>
-            <a:srgbClr val="D40511"/>
-          </a:solidFill>
-          <a:ln>
-            <a:noFill/>
-          </a:ln>
-          <a:effectLst/>
-        </p:spPr>
-        <p:style>
-          <a:lnRef idx="1">
-            <a:schemeClr val="accent1"/>
-          </a:lnRef>
-          <a:fillRef idx="3">
-            <a:schemeClr val="accent1"/>
-          </a:fillRef>
-          <a:effectRef idx="2">
-            <a:schemeClr val="accent1"/>
-          </a:effectRef>
-          <a:fontRef idx="minor">
-            <a:schemeClr val="lt1"/>
-          </a:fontRef>
-        </p:style>
-        <p:txBody>
-          <a:bodyPr rtlCol="0" anchor="ctr"/>
-          <a:lstStyle/>
-          <a:p>
-            <a:pPr algn="ctr"/>
-          </a:p>
-        </p:txBody>
-      </p:sp>
-      <p:sp>
-        <p:nvSpPr>
-          <p:cNvPr id="9" name="TextBox 8"/>
-          <p:cNvSpPr txBox="1"/>
-          <p:nvPr/>
-        </p:nvSpPr>
-        <p:spPr>
-          <a:xfrm>
-            <a:off x="868680" y="2450592"/>
-            <a:ext cx="4937760" cy="1554480"/>
+            <a:ext cx="10881360" cy="4023360"/>
           </a:xfrm>
           <a:prstGeom prst="rect">
             <a:avLst/>
@@ -7587,187 +7497,95 @@
           <a:p>
             <a:pPr algn="l">
               <a:spcAft>
-                <a:spcPts val="700"/>
-              </a:spcAft>
-            </a:pPr>
-            <a:r>
-              <a:rPr sz="1400" b="1" i="0">
-                <a:solidFill>
-                  <a:srgbClr val="A5040D"/>
-                </a:solidFill>
-                <a:latin typeface="Calibri"/>
-              </a:rPr>
-              <a:t>Automation &amp; Data</a:t>
-            </a:r>
-          </a:p>
-          <a:p>
-            <a:pPr algn="l">
-              <a:spcAft>
-                <a:spcPts val="400"/>
-              </a:spcAft>
-            </a:pPr>
-            <a:r>
-              <a:rPr sz="1250" b="0" i="0">
+                <a:spcPts val="1300"/>
+              </a:spcAft>
+            </a:pPr>
+            <a:r>
+              <a:rPr sz="1550" b="0" i="0">
                 <a:solidFill>
                   <a:srgbClr val="1A1D21"/>
                 </a:solidFill>
                 <a:latin typeface="Calibri"/>
               </a:rPr>
-              <a:t>•  Power Query (M)</a:t>
-            </a:r>
-          </a:p>
-          <a:p>
-            <a:pPr algn="l">
-              <a:spcAft>
-                <a:spcPts val="400"/>
-              </a:spcAft>
-            </a:pPr>
-            <a:r>
-              <a:rPr sz="1250" b="0" i="0">
+              <a:t>•  How accounts receivable connects to the wider health and performance of the business.</a:t>
+            </a:r>
+          </a:p>
+          <a:p>
+            <a:pPr algn="l">
+              <a:spcAft>
+                <a:spcPts val="1300"/>
+              </a:spcAft>
+            </a:pPr>
+            <a:r>
+              <a:rPr sz="1550" b="0" i="0">
                 <a:solidFill>
                   <a:srgbClr val="1A1D21"/>
                 </a:solidFill>
                 <a:latin typeface="Calibri"/>
               </a:rPr>
-              <a:t>•  Office Scripts (TypeScript)</a:t>
-            </a:r>
-          </a:p>
-          <a:p>
-            <a:pPr algn="l">
-              <a:spcAft>
-                <a:spcPts val="400"/>
-              </a:spcAft>
-            </a:pPr>
-            <a:r>
-              <a:rPr sz="1250" b="0" i="0">
+              <a:t>•  How to take a business problem and turn it into a practical automation opportunity.</a:t>
+            </a:r>
+          </a:p>
+          <a:p>
+            <a:pPr algn="l">
+              <a:spcAft>
+                <a:spcPts val="1300"/>
+              </a:spcAft>
+            </a:pPr>
+            <a:r>
+              <a:rPr sz="1550" b="0" i="0">
                 <a:solidFill>
                   <a:srgbClr val="1A1D21"/>
                 </a:solidFill>
                 <a:latin typeface="Calibri"/>
               </a:rPr>
-              <a:t>•  Power Automate</a:t>
-            </a:r>
-          </a:p>
-          <a:p>
-            <a:pPr algn="l">
-              <a:spcAft>
-                <a:spcPts val="400"/>
-              </a:spcAft>
-            </a:pPr>
-            <a:r>
-              <a:rPr sz="1250" b="0" i="0">
+              <a:t>•  How to work with people across finance, collections, and IT to get something built.</a:t>
+            </a:r>
+          </a:p>
+          <a:p>
+            <a:pPr algn="l">
+              <a:spcAft>
+                <a:spcPts val="1300"/>
+              </a:spcAft>
+            </a:pPr>
+            <a:r>
+              <a:rPr sz="1550" b="0" i="0">
                 <a:solidFill>
                   <a:srgbClr val="1A1D21"/>
                 </a:solidFill>
                 <a:latin typeface="Calibri"/>
               </a:rPr>
-              <a:t>•  SharePoint / GitHub Actions</a:t>
-            </a:r>
-          </a:p>
-        </p:txBody>
-      </p:sp>
-      <p:sp>
-        <p:nvSpPr>
-          <p:cNvPr id="10" name="Rounded Rectangle 9"/>
-          <p:cNvSpPr/>
-          <p:nvPr/>
-        </p:nvSpPr>
-        <p:spPr>
-          <a:xfrm>
-            <a:off x="6217920" y="2286000"/>
-            <a:ext cx="5349240" cy="1828800"/>
-          </a:xfrm>
-          <a:prstGeom prst="roundRect">
-            <a:avLst>
-              <a:gd name="adj" fmla="val 7000"/>
-            </a:avLst>
-          </a:prstGeom>
-          <a:solidFill>
-            <a:srgbClr val="FFFFFF"/>
-          </a:solidFill>
-          <a:ln w="9525">
-            <a:solidFill>
-              <a:srgbClr val="E2E0DA"/>
-            </a:solidFill>
-          </a:ln>
-          <a:effectLst/>
-        </p:spPr>
-        <p:style>
-          <a:lnRef idx="1">
-            <a:schemeClr val="accent1"/>
-          </a:lnRef>
-          <a:fillRef idx="3">
-            <a:schemeClr val="accent1"/>
-          </a:fillRef>
-          <a:effectRef idx="2">
-            <a:schemeClr val="accent1"/>
-          </a:effectRef>
-          <a:fontRef idx="minor">
-            <a:schemeClr val="lt1"/>
-          </a:fontRef>
-        </p:style>
-        <p:txBody>
-          <a:bodyPr rtlCol="0" anchor="ctr"/>
-          <a:lstStyle/>
-          <a:p>
-            <a:pPr algn="ctr"/>
-          </a:p>
-        </p:txBody>
-      </p:sp>
-      <p:sp>
-        <p:nvSpPr>
-          <p:cNvPr id="11" name="Rectangle 10"/>
-          <p:cNvSpPr/>
-          <p:nvPr/>
-        </p:nvSpPr>
-        <p:spPr>
-          <a:xfrm>
-            <a:off x="6217920" y="2286000"/>
-            <a:ext cx="50800" cy="1828800"/>
-          </a:xfrm>
-          <a:prstGeom prst="rect">
-            <a:avLst/>
-          </a:prstGeom>
-          <a:solidFill>
-            <a:srgbClr val="D40511"/>
-          </a:solidFill>
-          <a:ln>
-            <a:noFill/>
-          </a:ln>
-          <a:effectLst/>
-        </p:spPr>
-        <p:style>
-          <a:lnRef idx="1">
-            <a:schemeClr val="accent1"/>
-          </a:lnRef>
-          <a:fillRef idx="3">
-            <a:schemeClr val="accent1"/>
-          </a:fillRef>
-          <a:effectRef idx="2">
-            <a:schemeClr val="accent1"/>
-          </a:effectRef>
-          <a:fontRef idx="minor">
-            <a:schemeClr val="lt1"/>
-          </a:fontRef>
-        </p:style>
-        <p:txBody>
-          <a:bodyPr rtlCol="0" anchor="ctr"/>
-          <a:lstStyle/>
-          <a:p>
-            <a:pPr algn="ctr"/>
-          </a:p>
-        </p:txBody>
-      </p:sp>
-      <p:sp>
-        <p:nvSpPr>
-          <p:cNvPr id="12" name="TextBox 11"/>
+              <a:t>•  Why it is worth designing scalable, reusable solutions instead of one-off fixes.</a:t>
+            </a:r>
+          </a:p>
+          <a:p>
+            <a:pPr algn="l">
+              <a:spcAft>
+                <a:spcPts val="1300"/>
+              </a:spcAft>
+            </a:pPr>
+            <a:r>
+              <a:rPr sz="1550" b="0" i="0">
+                <a:solidFill>
+                  <a:srgbClr val="1A1D21"/>
+                </a:solidFill>
+                <a:latin typeface="Calibri"/>
+              </a:rPr>
+              <a:t>•  How to stay calm and methodical when something breaks, and recover from it properly.</a:t>
+            </a:r>
+          </a:p>
+        </p:txBody>
+      </p:sp>
+      <p:sp>
+        <p:nvSpPr>
+          <p:cNvPr id="8" name="TextBox 7"/>
           <p:cNvSpPr txBox="1"/>
           <p:nvPr/>
         </p:nvSpPr>
         <p:spPr>
           <a:xfrm>
-            <a:off x="6446520" y="2450592"/>
-            <a:ext cx="4937760" cy="1554480"/>
+            <a:off x="640080" y="6537960"/>
+            <a:ext cx="8229600" cy="274320"/>
           </a:xfrm>
           <a:prstGeom prst="rect">
             <a:avLst/>
@@ -7782,499 +7600,6 @@
           <a:p>
             <a:pPr algn="l">
               <a:spcAft>
-                <a:spcPts val="700"/>
-              </a:spcAft>
-            </a:pPr>
-            <a:r>
-              <a:rPr sz="1400" b="1" i="0">
-                <a:solidFill>
-                  <a:srgbClr val="A5040D"/>
-                </a:solidFill>
-                <a:latin typeface="Calibri"/>
-              </a:rPr>
-              <a:t>Analysis &amp; Modeling</a:t>
-            </a:r>
-          </a:p>
-          <a:p>
-            <a:pPr algn="l">
-              <a:spcAft>
-                <a:spcPts val="400"/>
-              </a:spcAft>
-            </a:pPr>
-            <a:r>
-              <a:rPr sz="1250" b="0" i="0">
-                <a:solidFill>
-                  <a:srgbClr val="1A1D21"/>
-                </a:solidFill>
-                <a:latin typeface="Calibri"/>
-              </a:rPr>
-              <a:t>•  AR aging &amp; cash-application logic</a:t>
-            </a:r>
-          </a:p>
-          <a:p>
-            <a:pPr algn="l">
-              <a:spcAft>
-                <a:spcPts val="400"/>
-              </a:spcAft>
-            </a:pPr>
-            <a:r>
-              <a:rPr sz="1250" b="0" i="0">
-                <a:solidFill>
-                  <a:srgbClr val="1A1D21"/>
-                </a:solidFill>
-                <a:latin typeface="Calibri"/>
-              </a:rPr>
-              <a:t>•  Data consolidation &amp; modeling</a:t>
-            </a:r>
-          </a:p>
-          <a:p>
-            <a:pPr algn="l">
-              <a:spcAft>
-                <a:spcPts val="400"/>
-              </a:spcAft>
-            </a:pPr>
-            <a:r>
-              <a:rPr sz="1250" b="0" i="0">
-                <a:solidFill>
-                  <a:srgbClr val="1A1D21"/>
-                </a:solidFill>
-                <a:latin typeface="Calibri"/>
-              </a:rPr>
-              <a:t>•  Power BI</a:t>
-            </a:r>
-          </a:p>
-          <a:p>
-            <a:pPr algn="l">
-              <a:spcAft>
-                <a:spcPts val="400"/>
-              </a:spcAft>
-            </a:pPr>
-            <a:r>
-              <a:rPr sz="1250" b="0" i="0">
-                <a:solidFill>
-                  <a:srgbClr val="1A1D21"/>
-                </a:solidFill>
-                <a:latin typeface="Calibri"/>
-              </a:rPr>
-              <a:t>•  MTD / snapshot filtering</a:t>
-            </a:r>
-          </a:p>
-        </p:txBody>
-      </p:sp>
-      <p:sp>
-        <p:nvSpPr>
-          <p:cNvPr id="13" name="Rounded Rectangle 12"/>
-          <p:cNvSpPr/>
-          <p:nvPr/>
-        </p:nvSpPr>
-        <p:spPr>
-          <a:xfrm>
-            <a:off x="640080" y="4343400"/>
-            <a:ext cx="5349240" cy="1828800"/>
-          </a:xfrm>
-          <a:prstGeom prst="roundRect">
-            <a:avLst>
-              <a:gd name="adj" fmla="val 7000"/>
-            </a:avLst>
-          </a:prstGeom>
-          <a:solidFill>
-            <a:srgbClr val="FFFFFF"/>
-          </a:solidFill>
-          <a:ln w="9525">
-            <a:solidFill>
-              <a:srgbClr val="E2E0DA"/>
-            </a:solidFill>
-          </a:ln>
-          <a:effectLst/>
-        </p:spPr>
-        <p:style>
-          <a:lnRef idx="1">
-            <a:schemeClr val="accent1"/>
-          </a:lnRef>
-          <a:fillRef idx="3">
-            <a:schemeClr val="accent1"/>
-          </a:fillRef>
-          <a:effectRef idx="2">
-            <a:schemeClr val="accent1"/>
-          </a:effectRef>
-          <a:fontRef idx="minor">
-            <a:schemeClr val="lt1"/>
-          </a:fontRef>
-        </p:style>
-        <p:txBody>
-          <a:bodyPr rtlCol="0" anchor="ctr"/>
-          <a:lstStyle/>
-          <a:p>
-            <a:pPr algn="ctr"/>
-          </a:p>
-        </p:txBody>
-      </p:sp>
-      <p:sp>
-        <p:nvSpPr>
-          <p:cNvPr id="14" name="Rectangle 13"/>
-          <p:cNvSpPr/>
-          <p:nvPr/>
-        </p:nvSpPr>
-        <p:spPr>
-          <a:xfrm>
-            <a:off x="640080" y="4343400"/>
-            <a:ext cx="50800" cy="1828800"/>
-          </a:xfrm>
-          <a:prstGeom prst="rect">
-            <a:avLst/>
-          </a:prstGeom>
-          <a:solidFill>
-            <a:srgbClr val="D40511"/>
-          </a:solidFill>
-          <a:ln>
-            <a:noFill/>
-          </a:ln>
-          <a:effectLst/>
-        </p:spPr>
-        <p:style>
-          <a:lnRef idx="1">
-            <a:schemeClr val="accent1"/>
-          </a:lnRef>
-          <a:fillRef idx="3">
-            <a:schemeClr val="accent1"/>
-          </a:fillRef>
-          <a:effectRef idx="2">
-            <a:schemeClr val="accent1"/>
-          </a:effectRef>
-          <a:fontRef idx="minor">
-            <a:schemeClr val="lt1"/>
-          </a:fontRef>
-        </p:style>
-        <p:txBody>
-          <a:bodyPr rtlCol="0" anchor="ctr"/>
-          <a:lstStyle/>
-          <a:p>
-            <a:pPr algn="ctr"/>
-          </a:p>
-        </p:txBody>
-      </p:sp>
-      <p:sp>
-        <p:nvSpPr>
-          <p:cNvPr id="15" name="TextBox 14"/>
-          <p:cNvSpPr txBox="1"/>
-          <p:nvPr/>
-        </p:nvSpPr>
-        <p:spPr>
-          <a:xfrm>
-            <a:off x="868680" y="4507992"/>
-            <a:ext cx="4937760" cy="1554480"/>
-          </a:xfrm>
-          <a:prstGeom prst="rect">
-            <a:avLst/>
-          </a:prstGeom>
-          <a:noFill/>
-        </p:spPr>
-        <p:txBody>
-          <a:bodyPr wrap="square" anchor="t" lIns="0" rIns="0" tIns="0" bIns="0">
-            <a:spAutoFit/>
-          </a:bodyPr>
-          <a:lstStyle/>
-          <a:p>
-            <a:pPr algn="l">
-              <a:spcAft>
-                <a:spcPts val="700"/>
-              </a:spcAft>
-            </a:pPr>
-            <a:r>
-              <a:rPr sz="1400" b="1" i="0">
-                <a:solidFill>
-                  <a:srgbClr val="A5040D"/>
-                </a:solidFill>
-                <a:latin typeface="Calibri"/>
-              </a:rPr>
-              <a:t>Product &amp; Front-End</a:t>
-            </a:r>
-          </a:p>
-          <a:p>
-            <a:pPr algn="l">
-              <a:spcAft>
-                <a:spcPts val="400"/>
-              </a:spcAft>
-            </a:pPr>
-            <a:r>
-              <a:rPr sz="1250" b="0" i="0">
-                <a:solidFill>
-                  <a:srgbClr val="1A1D21"/>
-                </a:solidFill>
-                <a:latin typeface="Calibri"/>
-              </a:rPr>
-              <a:t>•  HTML / CSS / JavaScript</a:t>
-            </a:r>
-          </a:p>
-          <a:p>
-            <a:pPr algn="l">
-              <a:spcAft>
-                <a:spcPts val="400"/>
-              </a:spcAft>
-            </a:pPr>
-            <a:r>
-              <a:rPr sz="1250" b="0" i="0">
-                <a:solidFill>
-                  <a:srgbClr val="1A1D21"/>
-                </a:solidFill>
-                <a:latin typeface="Calibri"/>
-              </a:rPr>
-              <a:t>•  SVG charting &amp; dashboards</a:t>
-            </a:r>
-          </a:p>
-          <a:p>
-            <a:pPr algn="l">
-              <a:spcAft>
-                <a:spcPts val="400"/>
-              </a:spcAft>
-            </a:pPr>
-            <a:r>
-              <a:rPr sz="1250" b="0" i="0">
-                <a:solidFill>
-                  <a:srgbClr val="1A1D21"/>
-                </a:solidFill>
-                <a:latin typeface="Calibri"/>
-              </a:rPr>
-              <a:t>•  UX for non-technical users</a:t>
-            </a:r>
-          </a:p>
-          <a:p>
-            <a:pPr algn="l">
-              <a:spcAft>
-                <a:spcPts val="400"/>
-              </a:spcAft>
-            </a:pPr>
-            <a:r>
-              <a:rPr sz="1250" b="0" i="0">
-                <a:solidFill>
-                  <a:srgbClr val="1A1D21"/>
-                </a:solidFill>
-                <a:latin typeface="Calibri"/>
-              </a:rPr>
-              <a:t>•  Clear documentation</a:t>
-            </a:r>
-          </a:p>
-        </p:txBody>
-      </p:sp>
-      <p:sp>
-        <p:nvSpPr>
-          <p:cNvPr id="16" name="Rounded Rectangle 15"/>
-          <p:cNvSpPr/>
-          <p:nvPr/>
-        </p:nvSpPr>
-        <p:spPr>
-          <a:xfrm>
-            <a:off x="6217920" y="4343400"/>
-            <a:ext cx="5349240" cy="1828800"/>
-          </a:xfrm>
-          <a:prstGeom prst="roundRect">
-            <a:avLst>
-              <a:gd name="adj" fmla="val 7000"/>
-            </a:avLst>
-          </a:prstGeom>
-          <a:solidFill>
-            <a:srgbClr val="FFFFFF"/>
-          </a:solidFill>
-          <a:ln w="9525">
-            <a:solidFill>
-              <a:srgbClr val="E2E0DA"/>
-            </a:solidFill>
-          </a:ln>
-          <a:effectLst/>
-        </p:spPr>
-        <p:style>
-          <a:lnRef idx="1">
-            <a:schemeClr val="accent1"/>
-          </a:lnRef>
-          <a:fillRef idx="3">
-            <a:schemeClr val="accent1"/>
-          </a:fillRef>
-          <a:effectRef idx="2">
-            <a:schemeClr val="accent1"/>
-          </a:effectRef>
-          <a:fontRef idx="minor">
-            <a:schemeClr val="lt1"/>
-          </a:fontRef>
-        </p:style>
-        <p:txBody>
-          <a:bodyPr rtlCol="0" anchor="ctr"/>
-          <a:lstStyle/>
-          <a:p>
-            <a:pPr algn="ctr"/>
-          </a:p>
-        </p:txBody>
-      </p:sp>
-      <p:sp>
-        <p:nvSpPr>
-          <p:cNvPr id="17" name="Rectangle 16"/>
-          <p:cNvSpPr/>
-          <p:nvPr/>
-        </p:nvSpPr>
-        <p:spPr>
-          <a:xfrm>
-            <a:off x="6217920" y="4343400"/>
-            <a:ext cx="50800" cy="1828800"/>
-          </a:xfrm>
-          <a:prstGeom prst="rect">
-            <a:avLst/>
-          </a:prstGeom>
-          <a:solidFill>
-            <a:srgbClr val="D40511"/>
-          </a:solidFill>
-          <a:ln>
-            <a:noFill/>
-          </a:ln>
-          <a:effectLst/>
-        </p:spPr>
-        <p:style>
-          <a:lnRef idx="1">
-            <a:schemeClr val="accent1"/>
-          </a:lnRef>
-          <a:fillRef idx="3">
-            <a:schemeClr val="accent1"/>
-          </a:fillRef>
-          <a:effectRef idx="2">
-            <a:schemeClr val="accent1"/>
-          </a:effectRef>
-          <a:fontRef idx="minor">
-            <a:schemeClr val="lt1"/>
-          </a:fontRef>
-        </p:style>
-        <p:txBody>
-          <a:bodyPr rtlCol="0" anchor="ctr"/>
-          <a:lstStyle/>
-          <a:p>
-            <a:pPr algn="ctr"/>
-          </a:p>
-        </p:txBody>
-      </p:sp>
-      <p:sp>
-        <p:nvSpPr>
-          <p:cNvPr id="18" name="TextBox 17"/>
-          <p:cNvSpPr txBox="1"/>
-          <p:nvPr/>
-        </p:nvSpPr>
-        <p:spPr>
-          <a:xfrm>
-            <a:off x="6446520" y="4507992"/>
-            <a:ext cx="4937760" cy="1554480"/>
-          </a:xfrm>
-          <a:prstGeom prst="rect">
-            <a:avLst/>
-          </a:prstGeom>
-          <a:noFill/>
-        </p:spPr>
-        <p:txBody>
-          <a:bodyPr wrap="square" anchor="t" lIns="0" rIns="0" tIns="0" bIns="0">
-            <a:spAutoFit/>
-          </a:bodyPr>
-          <a:lstStyle/>
-          <a:p>
-            <a:pPr algn="l">
-              <a:spcAft>
-                <a:spcPts val="700"/>
-              </a:spcAft>
-            </a:pPr>
-            <a:r>
-              <a:rPr sz="1400" b="1" i="0">
-                <a:solidFill>
-                  <a:srgbClr val="A5040D"/>
-                </a:solidFill>
-                <a:latin typeface="Calibri"/>
-              </a:rPr>
-              <a:t>Ways of Working</a:t>
-            </a:r>
-          </a:p>
-          <a:p>
-            <a:pPr algn="l">
-              <a:spcAft>
-                <a:spcPts val="400"/>
-              </a:spcAft>
-            </a:pPr>
-            <a:r>
-              <a:rPr sz="1250" b="0" i="0">
-                <a:solidFill>
-                  <a:srgbClr val="1A1D21"/>
-                </a:solidFill>
-                <a:latin typeface="Calibri"/>
-              </a:rPr>
-              <a:t>•  Reverse-engineering undocumented processes</a:t>
-            </a:r>
-          </a:p>
-          <a:p>
-            <a:pPr algn="l">
-              <a:spcAft>
-                <a:spcPts val="400"/>
-              </a:spcAft>
-            </a:pPr>
-            <a:r>
-              <a:rPr sz="1250" b="0" i="0">
-                <a:solidFill>
-                  <a:srgbClr val="1A1D21"/>
-                </a:solidFill>
-                <a:latin typeface="Calibri"/>
-              </a:rPr>
-              <a:t>•  Working from ambiguity</a:t>
-            </a:r>
-          </a:p>
-          <a:p>
-            <a:pPr algn="l">
-              <a:spcAft>
-                <a:spcPts val="400"/>
-              </a:spcAft>
-            </a:pPr>
-            <a:r>
-              <a:rPr sz="1250" b="0" i="0">
-                <a:solidFill>
-                  <a:srgbClr val="1A1D21"/>
-                </a:solidFill>
-                <a:latin typeface="Calibri"/>
-              </a:rPr>
-              <a:t>•  Production troubleshooting</a:t>
-            </a:r>
-          </a:p>
-          <a:p>
-            <a:pPr algn="l">
-              <a:spcAft>
-                <a:spcPts val="400"/>
-              </a:spcAft>
-            </a:pPr>
-            <a:r>
-              <a:rPr sz="1250" b="0" i="0">
-                <a:solidFill>
-                  <a:srgbClr val="1A1D21"/>
-                </a:solidFill>
-                <a:latin typeface="Calibri"/>
-              </a:rPr>
-              <a:t>•  Following things through to done</a:t>
-            </a:r>
-          </a:p>
-        </p:txBody>
-      </p:sp>
-      <p:sp>
-        <p:nvSpPr>
-          <p:cNvPr id="19" name="TextBox 18"/>
-          <p:cNvSpPr txBox="1"/>
-          <p:nvPr/>
-        </p:nvSpPr>
-        <p:spPr>
-          <a:xfrm>
-            <a:off x="640080" y="6537960"/>
-            <a:ext cx="8229600" cy="274320"/>
-          </a:xfrm>
-          <a:prstGeom prst="rect">
-            <a:avLst/>
-          </a:prstGeom>
-          <a:noFill/>
-        </p:spPr>
-        <p:txBody>
-          <a:bodyPr wrap="square" anchor="t" lIns="0" rIns="0" tIns="0" bIns="0">
-            <a:spAutoFit/>
-          </a:bodyPr>
-          <a:lstStyle/>
-          <a:p>
-            <a:pPr algn="l">
-              <a:spcAft>
                 <a:spcPts val="600"/>
               </a:spcAft>
             </a:pPr>
@@ -8292,7 +7617,7 @@
       </p:sp>
       <p:sp>
         <p:nvSpPr>
-          <p:cNvPr id="20" name="TextBox 19"/>
+          <p:cNvPr id="9" name="TextBox 8"/>
           <p:cNvSpPr txBox="1"/>
           <p:nvPr/>
         </p:nvSpPr>
@@ -8425,7 +7750,7 @@
                 </a:solidFill>
                 <a:latin typeface="Calibri"/>
               </a:rPr>
-              <a:t>WHAT I'M MOST PROUD OF</a:t>
+              <a:t>WHAT I'D DO DIFFERENTLY</a:t>
             </a:r>
           </a:p>
         </p:txBody>
@@ -8508,7 +7833,7 @@
                 </a:solidFill>
                 <a:latin typeface="Calibri"/>
               </a:rPr>
-              <a:t>A few things that meant the most to me</a:t>
+              <a:t>Where I want to grow from here</a:t>
             </a:r>
           </a:p>
         </p:txBody>
@@ -8581,7 +7906,7 @@
           <a:p>
             <a:pPr algn="l">
               <a:spcAft>
-                <a:spcPts val="1300"/>
+                <a:spcPts val="1500"/>
               </a:spcAft>
             </a:pPr>
             <a:r>
@@ -8591,13 +7916,13 @@
                 </a:solidFill>
                 <a:latin typeface="Calibri"/>
               </a:rPr>
-              <a:t>•  Building three automation solutions that are genuinely in use, not just prototypes.</a:t>
-            </a:r>
-          </a:p>
-          <a:p>
-            <a:pPr algn="l">
-              <a:spcAft>
-                <a:spcPts val="1300"/>
+              <a:t>•  Spend more time on design up front. Map the process and sketch the architecture before building, so there is less rebuilding later when a new requirement appears.</a:t>
+            </a:r>
+          </a:p>
+          <a:p>
+            <a:pPr algn="l">
+              <a:spcAft>
+                <a:spcPts val="1500"/>
               </a:spcAft>
             </a:pPr>
             <a:r>
@@ -8607,13 +7932,13 @@
                 </a:solidFill>
                 <a:latin typeface="Calibri"/>
               </a:rPr>
-              <a:t>•  Taking real, repetitive reporting effort off the team's plate each day.</a:t>
-            </a:r>
-          </a:p>
-          <a:p>
-            <a:pPr algn="l">
-              <a:spcAft>
-                <a:spcPts val="1300"/>
+              <a:t>•  Document while I build, not at the end. As the automations grew more complex, earlier notes would have made them easier to hand off and maintain.</a:t>
+            </a:r>
+          </a:p>
+          <a:p>
+            <a:pPr algn="l">
+              <a:spcAft>
+                <a:spcPts val="1500"/>
               </a:spcAft>
             </a:pPr>
             <a:r>
@@ -8623,46 +7948,101 @@
                 </a:solidFill>
                 <a:latin typeface="Calibri"/>
               </a:rPr>
-              <a:t>•  Creating reusable frameworks that can grow, rather than one-time fixes.</a:t>
-            </a:r>
-          </a:p>
-          <a:p>
-            <a:pPr algn="l">
-              <a:spcAft>
-                <a:spcPts val="1300"/>
-              </a:spcAft>
-            </a:pPr>
-            <a:r>
-              <a:rPr sz="1550" b="0" i="0">
-                <a:solidFill>
-                  <a:srgbClr val="1A1D21"/>
-                </a:solidFill>
-                <a:latin typeface="Calibri"/>
-              </a:rPr>
-              <a:t>•  Leaving behind solutions that keep running after the internship ends.</a:t>
-            </a:r>
-          </a:p>
-          <a:p>
-            <a:pPr algn="l">
-              <a:spcAft>
-                <a:spcPts val="1300"/>
-              </a:spcAft>
-            </a:pPr>
-            <a:r>
-              <a:rPr sz="1550" b="0" i="0">
-                <a:solidFill>
-                  <a:srgbClr val="1A1D21"/>
-                </a:solidFill>
-                <a:latin typeface="Calibri"/>
-              </a:rPr>
-              <a:t>•  Giving the team clearer visibility into AR performance and collections activity.</a:t>
-            </a:r>
-          </a:p>
-        </p:txBody>
-      </p:sp>
-      <p:sp>
-        <p:nvSpPr>
-          <p:cNvPr id="8" name="TextBox 7"/>
+              <a:t>•  Validate the workflow with users earlier and more often. Not just "can I make this work," but "is this the workflow people actually want."</a:t>
+            </a:r>
+          </a:p>
+        </p:txBody>
+      </p:sp>
+      <p:sp>
+        <p:nvSpPr>
+          <p:cNvPr id="8" name="Rounded Rectangle 7"/>
+          <p:cNvSpPr/>
+          <p:nvPr/>
+        </p:nvSpPr>
+        <p:spPr>
+          <a:xfrm>
+            <a:off x="640080" y="5257800"/>
+            <a:ext cx="10881360" cy="822960"/>
+          </a:xfrm>
+          <a:prstGeom prst="roundRect">
+            <a:avLst>
+              <a:gd name="adj" fmla="val 10000"/>
+            </a:avLst>
+          </a:prstGeom>
+          <a:solidFill>
+            <a:srgbClr val="FCEFEF"/>
+          </a:solidFill>
+          <a:ln w="9525">
+            <a:solidFill>
+              <a:srgbClr val="E2E0DA"/>
+            </a:solidFill>
+          </a:ln>
+          <a:effectLst/>
+        </p:spPr>
+        <p:style>
+          <a:lnRef idx="1">
+            <a:schemeClr val="accent1"/>
+          </a:lnRef>
+          <a:fillRef idx="3">
+            <a:schemeClr val="accent1"/>
+          </a:fillRef>
+          <a:effectRef idx="2">
+            <a:schemeClr val="accent1"/>
+          </a:effectRef>
+          <a:fontRef idx="minor">
+            <a:schemeClr val="lt1"/>
+          </a:fontRef>
+        </p:style>
+        <p:txBody>
+          <a:bodyPr rtlCol="0" anchor="ctr"/>
+          <a:lstStyle/>
+          <a:p>
+            <a:pPr algn="ctr"/>
+          </a:p>
+        </p:txBody>
+      </p:sp>
+      <p:sp>
+        <p:nvSpPr>
+          <p:cNvPr id="9" name="TextBox 8"/>
+          <p:cNvSpPr txBox="1"/>
+          <p:nvPr/>
+        </p:nvSpPr>
+        <p:spPr>
+          <a:xfrm>
+            <a:off x="914400" y="5349240"/>
+            <a:ext cx="10332720" cy="640080"/>
+          </a:xfrm>
+          <a:prstGeom prst="rect">
+            <a:avLst/>
+          </a:prstGeom>
+          <a:noFill/>
+        </p:spPr>
+        <p:txBody>
+          <a:bodyPr wrap="square" anchor="ctr" lIns="0" rIns="0" tIns="0" bIns="0">
+            <a:spAutoFit/>
+          </a:bodyPr>
+          <a:lstStyle/>
+          <a:p>
+            <a:pPr algn="l">
+              <a:spcAft>
+                <a:spcPts val="600"/>
+              </a:spcAft>
+            </a:pPr>
+            <a:r>
+              <a:rPr sz="1350" b="1" i="0">
+                <a:solidFill>
+                  <a:srgbClr val="A5040D"/>
+                </a:solidFill>
+                <a:latin typeface="Calibri"/>
+              </a:rPr>
+              <a:t>In short, I want to grow from building automations toward designing them: more thought up front, better documentation, and scalability from the start.</a:t>
+            </a:r>
+          </a:p>
+        </p:txBody>
+      </p:sp>
+      <p:sp>
+        <p:nvSpPr>
+          <p:cNvPr id="10" name="TextBox 9"/>
           <p:cNvSpPr txBox="1"/>
           <p:nvPr/>
         </p:nvSpPr>
@@ -8701,7 +8081,7 @@
       </p:sp>
       <p:sp>
         <p:nvSpPr>
-          <p:cNvPr id="9" name="TextBox 8"/>
+          <p:cNvPr id="11" name="TextBox 10"/>
           <p:cNvSpPr txBox="1"/>
           <p:nvPr/>
         </p:nvSpPr>
@@ -8834,7 +8214,7 @@
                 </a:solidFill>
                 <a:latin typeface="Calibri"/>
               </a:rPr>
-              <a:t>WHAT'S NEXT</a:t>
+              <a:t>WHAT IT TOOK</a:t>
             </a:r>
           </a:p>
         </p:txBody>
@@ -8917,7 +8297,7 @@
                 </a:solidFill>
                 <a:latin typeface="Calibri"/>
               </a:rPr>
-              <a:t>How this can grow from here</a:t>
+              <a:t>Skills I got to build and use</a:t>
             </a:r>
           </a:p>
         </p:txBody>
@@ -8968,14 +8348,106 @@
       </p:sp>
       <p:sp>
         <p:nvSpPr>
-          <p:cNvPr id="7" name="TextBox 6"/>
+          <p:cNvPr id="7" name="Rounded Rectangle 6"/>
+          <p:cNvSpPr/>
+          <p:nvPr/>
+        </p:nvSpPr>
+        <p:spPr>
+          <a:xfrm>
+            <a:off x="640080" y="2286000"/>
+            <a:ext cx="5349240" cy="1828800"/>
+          </a:xfrm>
+          <a:prstGeom prst="roundRect">
+            <a:avLst>
+              <a:gd name="adj" fmla="val 7000"/>
+            </a:avLst>
+          </a:prstGeom>
+          <a:solidFill>
+            <a:srgbClr val="FFFFFF"/>
+          </a:solidFill>
+          <a:ln w="9525">
+            <a:solidFill>
+              <a:srgbClr val="E2E0DA"/>
+            </a:solidFill>
+          </a:ln>
+          <a:effectLst/>
+        </p:spPr>
+        <p:style>
+          <a:lnRef idx="1">
+            <a:schemeClr val="accent1"/>
+          </a:lnRef>
+          <a:fillRef idx="3">
+            <a:schemeClr val="accent1"/>
+          </a:fillRef>
+          <a:effectRef idx="2">
+            <a:schemeClr val="accent1"/>
+          </a:effectRef>
+          <a:fontRef idx="minor">
+            <a:schemeClr val="lt1"/>
+          </a:fontRef>
+        </p:style>
+        <p:txBody>
+          <a:bodyPr rtlCol="0" anchor="ctr"/>
+          <a:lstStyle/>
+          <a:p>
+            <a:pPr algn="ctr"/>
+          </a:p>
+        </p:txBody>
+      </p:sp>
+      <p:sp>
+        <p:nvSpPr>
+          <p:cNvPr id="8" name="Rectangle 7"/>
+          <p:cNvSpPr/>
+          <p:nvPr/>
+        </p:nvSpPr>
+        <p:spPr>
+          <a:xfrm>
+            <a:off x="640080" y="2286000"/>
+            <a:ext cx="50800" cy="1828800"/>
+          </a:xfrm>
+          <a:prstGeom prst="rect">
+            <a:avLst/>
+          </a:prstGeom>
+          <a:solidFill>
+            <a:srgbClr val="D40511"/>
+          </a:solidFill>
+          <a:ln>
+            <a:noFill/>
+          </a:ln>
+          <a:effectLst/>
+        </p:spPr>
+        <p:style>
+          <a:lnRef idx="1">
+            <a:schemeClr val="accent1"/>
+          </a:lnRef>
+          <a:fillRef idx="3">
+            <a:schemeClr val="accent1"/>
+          </a:fillRef>
+          <a:effectRef idx="2">
+            <a:schemeClr val="accent1"/>
+          </a:effectRef>
+          <a:fontRef idx="minor">
+            <a:schemeClr val="lt1"/>
+          </a:fontRef>
+        </p:style>
+        <p:txBody>
+          <a:bodyPr rtlCol="0" anchor="ctr"/>
+          <a:lstStyle/>
+          <a:p>
+            <a:pPr algn="ctr"/>
+          </a:p>
+        </p:txBody>
+      </p:sp>
+      <p:sp>
+        <p:nvSpPr>
+          <p:cNvPr id="9" name="TextBox 8"/>
           <p:cNvSpPr txBox="1"/>
           <p:nvPr/>
         </p:nvSpPr>
         <p:spPr>
           <a:xfrm>
-            <a:off x="640080" y="2286000"/>
-            <a:ext cx="10881360" cy="4023360"/>
+            <a:off x="868680" y="2450592"/>
+            <a:ext cx="4937760" cy="1554480"/>
           </a:xfrm>
           <a:prstGeom prst="rect">
             <a:avLst/>
@@ -8990,79 +8462,187 @@
           <a:p>
             <a:pPr algn="l">
               <a:spcAft>
-                <a:spcPts val="1300"/>
-              </a:spcAft>
-            </a:pPr>
-            <a:r>
-              <a:rPr sz="1550" b="0" i="0">
+                <a:spcPts val="700"/>
+              </a:spcAft>
+            </a:pPr>
+            <a:r>
+              <a:rPr sz="1400" b="1" i="0">
+                <a:solidFill>
+                  <a:srgbClr val="A5040D"/>
+                </a:solidFill>
+                <a:latin typeface="Calibri"/>
+              </a:rPr>
+              <a:t>Automation &amp; Data</a:t>
+            </a:r>
+          </a:p>
+          <a:p>
+            <a:pPr algn="l">
+              <a:spcAft>
+                <a:spcPts val="400"/>
+              </a:spcAft>
+            </a:pPr>
+            <a:r>
+              <a:rPr sz="1250" b="0" i="0">
                 <a:solidFill>
                   <a:srgbClr val="1A1D21"/>
                 </a:solidFill>
                 <a:latin typeface="Calibri"/>
               </a:rPr>
-              <a:t>•  Extend the SOA framework to more customers and countries, since the reusable engine is already in place.</a:t>
-            </a:r>
-          </a:p>
-          <a:p>
-            <a:pPr algn="l">
-              <a:spcAft>
-                <a:spcPts val="1300"/>
-              </a:spcAft>
-            </a:pPr>
-            <a:r>
-              <a:rPr sz="1550" b="0" i="0">
+              <a:t>•  Power Query (M)</a:t>
+            </a:r>
+          </a:p>
+          <a:p>
+            <a:pPr algn="l">
+              <a:spcAft>
+                <a:spcPts val="400"/>
+              </a:spcAft>
+            </a:pPr>
+            <a:r>
+              <a:rPr sz="1250" b="0" i="0">
                 <a:solidFill>
                   <a:srgbClr val="1A1D21"/>
                 </a:solidFill>
                 <a:latin typeface="Calibri"/>
               </a:rPr>
-              <a:t>•  Move the data layer toward a centralized database (SQL and Data Factory), which would be a stronger backbone for everything above.</a:t>
-            </a:r>
-          </a:p>
-          <a:p>
-            <a:pPr algn="l">
-              <a:spcAft>
-                <a:spcPts val="1300"/>
-              </a:spcAft>
-            </a:pPr>
-            <a:r>
-              <a:rPr sz="1550" b="0" i="0">
+              <a:t>•  Office Scripts (TypeScript)</a:t>
+            </a:r>
+          </a:p>
+          <a:p>
+            <a:pPr algn="l">
+              <a:spcAft>
+                <a:spcPts val="400"/>
+              </a:spcAft>
+            </a:pPr>
+            <a:r>
+              <a:rPr sz="1250" b="0" i="0">
                 <a:solidFill>
                   <a:srgbClr val="1A1D21"/>
                 </a:solidFill>
                 <a:latin typeface="Calibri"/>
               </a:rPr>
-              <a:t>•  Build leadership-facing Power BI dashboards on top of the same consolidated data.</a:t>
-            </a:r>
-          </a:p>
-          <a:p>
-            <a:pPr algn="l">
-              <a:spcAft>
-                <a:spcPts val="1300"/>
-              </a:spcAft>
-            </a:pPr>
-            <a:r>
-              <a:rPr sz="1550" b="0" i="0">
+              <a:t>•  Power Automate</a:t>
+            </a:r>
+          </a:p>
+          <a:p>
+            <a:pPr algn="l">
+              <a:spcAft>
+                <a:spcPts val="400"/>
+              </a:spcAft>
+            </a:pPr>
+            <a:r>
+              <a:rPr sz="1250" b="0" i="0">
                 <a:solidFill>
                   <a:srgbClr val="1A1D21"/>
                 </a:solidFill>
                 <a:latin typeface="Calibri"/>
               </a:rPr>
-              <a:t>•  Small hardening steps, like standardizing the monthly folder names and adding alerts for missing or late source files.</a:t>
-            </a:r>
-          </a:p>
-        </p:txBody>
-      </p:sp>
-      <p:sp>
-        <p:nvSpPr>
-          <p:cNvPr id="8" name="TextBox 7"/>
+              <a:t>•  SharePoint / GitHub Actions</a:t>
+            </a:r>
+          </a:p>
+        </p:txBody>
+      </p:sp>
+      <p:sp>
+        <p:nvSpPr>
+          <p:cNvPr id="10" name="Rounded Rectangle 9"/>
+          <p:cNvSpPr/>
+          <p:nvPr/>
+        </p:nvSpPr>
+        <p:spPr>
+          <a:xfrm>
+            <a:off x="6217920" y="2286000"/>
+            <a:ext cx="5349240" cy="1828800"/>
+          </a:xfrm>
+          <a:prstGeom prst="roundRect">
+            <a:avLst>
+              <a:gd name="adj" fmla="val 7000"/>
+            </a:avLst>
+          </a:prstGeom>
+          <a:solidFill>
+            <a:srgbClr val="FFFFFF"/>
+          </a:solidFill>
+          <a:ln w="9525">
+            <a:solidFill>
+              <a:srgbClr val="E2E0DA"/>
+            </a:solidFill>
+          </a:ln>
+          <a:effectLst/>
+        </p:spPr>
+        <p:style>
+          <a:lnRef idx="1">
+            <a:schemeClr val="accent1"/>
+          </a:lnRef>
+          <a:fillRef idx="3">
+            <a:schemeClr val="accent1"/>
+          </a:fillRef>
+          <a:effectRef idx="2">
+            <a:schemeClr val="accent1"/>
+          </a:effectRef>
+          <a:fontRef idx="minor">
+            <a:schemeClr val="lt1"/>
+          </a:fontRef>
+        </p:style>
+        <p:txBody>
+          <a:bodyPr rtlCol="0" anchor="ctr"/>
+          <a:lstStyle/>
+          <a:p>
+            <a:pPr algn="ctr"/>
+          </a:p>
+        </p:txBody>
+      </p:sp>
+      <p:sp>
+        <p:nvSpPr>
+          <p:cNvPr id="11" name="Rectangle 10"/>
+          <p:cNvSpPr/>
+          <p:nvPr/>
+        </p:nvSpPr>
+        <p:spPr>
+          <a:xfrm>
+            <a:off x="6217920" y="2286000"/>
+            <a:ext cx="50800" cy="1828800"/>
+          </a:xfrm>
+          <a:prstGeom prst="rect">
+            <a:avLst/>
+          </a:prstGeom>
+          <a:solidFill>
+            <a:srgbClr val="D40511"/>
+          </a:solidFill>
+          <a:ln>
+            <a:noFill/>
+          </a:ln>
+          <a:effectLst/>
+        </p:spPr>
+        <p:style>
+          <a:lnRef idx="1">
+            <a:schemeClr val="accent1"/>
+          </a:lnRef>
+          <a:fillRef idx="3">
+            <a:schemeClr val="accent1"/>
+          </a:fillRef>
+          <a:effectRef idx="2">
+            <a:schemeClr val="accent1"/>
+          </a:effectRef>
+          <a:fontRef idx="minor">
+            <a:schemeClr val="lt1"/>
+          </a:fontRef>
+        </p:style>
+        <p:txBody>
+          <a:bodyPr rtlCol="0" anchor="ctr"/>
+          <a:lstStyle/>
+          <a:p>
+            <a:pPr algn="ctr"/>
+          </a:p>
+        </p:txBody>
+      </p:sp>
+      <p:sp>
+        <p:nvSpPr>
+          <p:cNvPr id="12" name="TextBox 11"/>
           <p:cNvSpPr txBox="1"/>
           <p:nvPr/>
         </p:nvSpPr>
         <p:spPr>
           <a:xfrm>
-            <a:off x="640080" y="6537960"/>
-            <a:ext cx="8229600" cy="274320"/>
+            <a:off x="6446520" y="2450592"/>
+            <a:ext cx="4937760" cy="1554480"/>
           </a:xfrm>
           <a:prstGeom prst="rect">
             <a:avLst/>
@@ -9077,6 +8657,499 @@
           <a:p>
             <a:pPr algn="l">
               <a:spcAft>
+                <a:spcPts val="700"/>
+              </a:spcAft>
+            </a:pPr>
+            <a:r>
+              <a:rPr sz="1400" b="1" i="0">
+                <a:solidFill>
+                  <a:srgbClr val="A5040D"/>
+                </a:solidFill>
+                <a:latin typeface="Calibri"/>
+              </a:rPr>
+              <a:t>Analysis &amp; Modeling</a:t>
+            </a:r>
+          </a:p>
+          <a:p>
+            <a:pPr algn="l">
+              <a:spcAft>
+                <a:spcPts val="400"/>
+              </a:spcAft>
+            </a:pPr>
+            <a:r>
+              <a:rPr sz="1250" b="0" i="0">
+                <a:solidFill>
+                  <a:srgbClr val="1A1D21"/>
+                </a:solidFill>
+                <a:latin typeface="Calibri"/>
+              </a:rPr>
+              <a:t>•  AR aging &amp; cash-application logic</a:t>
+            </a:r>
+          </a:p>
+          <a:p>
+            <a:pPr algn="l">
+              <a:spcAft>
+                <a:spcPts val="400"/>
+              </a:spcAft>
+            </a:pPr>
+            <a:r>
+              <a:rPr sz="1250" b="0" i="0">
+                <a:solidFill>
+                  <a:srgbClr val="1A1D21"/>
+                </a:solidFill>
+                <a:latin typeface="Calibri"/>
+              </a:rPr>
+              <a:t>•  Data consolidation &amp; modeling</a:t>
+            </a:r>
+          </a:p>
+          <a:p>
+            <a:pPr algn="l">
+              <a:spcAft>
+                <a:spcPts val="400"/>
+              </a:spcAft>
+            </a:pPr>
+            <a:r>
+              <a:rPr sz="1250" b="0" i="0">
+                <a:solidFill>
+                  <a:srgbClr val="1A1D21"/>
+                </a:solidFill>
+                <a:latin typeface="Calibri"/>
+              </a:rPr>
+              <a:t>•  Power BI</a:t>
+            </a:r>
+          </a:p>
+          <a:p>
+            <a:pPr algn="l">
+              <a:spcAft>
+                <a:spcPts val="400"/>
+              </a:spcAft>
+            </a:pPr>
+            <a:r>
+              <a:rPr sz="1250" b="0" i="0">
+                <a:solidFill>
+                  <a:srgbClr val="1A1D21"/>
+                </a:solidFill>
+                <a:latin typeface="Calibri"/>
+              </a:rPr>
+              <a:t>•  MTD / snapshot filtering</a:t>
+            </a:r>
+          </a:p>
+        </p:txBody>
+      </p:sp>
+      <p:sp>
+        <p:nvSpPr>
+          <p:cNvPr id="13" name="Rounded Rectangle 12"/>
+          <p:cNvSpPr/>
+          <p:nvPr/>
+        </p:nvSpPr>
+        <p:spPr>
+          <a:xfrm>
+            <a:off x="640080" y="4343400"/>
+            <a:ext cx="5349240" cy="1828800"/>
+          </a:xfrm>
+          <a:prstGeom prst="roundRect">
+            <a:avLst>
+              <a:gd name="adj" fmla="val 7000"/>
+            </a:avLst>
+          </a:prstGeom>
+          <a:solidFill>
+            <a:srgbClr val="FFFFFF"/>
+          </a:solidFill>
+          <a:ln w="9525">
+            <a:solidFill>
+              <a:srgbClr val="E2E0DA"/>
+            </a:solidFill>
+          </a:ln>
+          <a:effectLst/>
+        </p:spPr>
+        <p:style>
+          <a:lnRef idx="1">
+            <a:schemeClr val="accent1"/>
+          </a:lnRef>
+          <a:fillRef idx="3">
+            <a:schemeClr val="accent1"/>
+          </a:fillRef>
+          <a:effectRef idx="2">
+            <a:schemeClr val="accent1"/>
+          </a:effectRef>
+          <a:fontRef idx="minor">
+            <a:schemeClr val="lt1"/>
+          </a:fontRef>
+        </p:style>
+        <p:txBody>
+          <a:bodyPr rtlCol="0" anchor="ctr"/>
+          <a:lstStyle/>
+          <a:p>
+            <a:pPr algn="ctr"/>
+          </a:p>
+        </p:txBody>
+      </p:sp>
+      <p:sp>
+        <p:nvSpPr>
+          <p:cNvPr id="14" name="Rectangle 13"/>
+          <p:cNvSpPr/>
+          <p:nvPr/>
+        </p:nvSpPr>
+        <p:spPr>
+          <a:xfrm>
+            <a:off x="640080" y="4343400"/>
+            <a:ext cx="50800" cy="1828800"/>
+          </a:xfrm>
+          <a:prstGeom prst="rect">
+            <a:avLst/>
+          </a:prstGeom>
+          <a:solidFill>
+            <a:srgbClr val="D40511"/>
+          </a:solidFill>
+          <a:ln>
+            <a:noFill/>
+          </a:ln>
+          <a:effectLst/>
+        </p:spPr>
+        <p:style>
+          <a:lnRef idx="1">
+            <a:schemeClr val="accent1"/>
+          </a:lnRef>
+          <a:fillRef idx="3">
+            <a:schemeClr val="accent1"/>
+          </a:fillRef>
+          <a:effectRef idx="2">
+            <a:schemeClr val="accent1"/>
+          </a:effectRef>
+          <a:fontRef idx="minor">
+            <a:schemeClr val="lt1"/>
+          </a:fontRef>
+        </p:style>
+        <p:txBody>
+          <a:bodyPr rtlCol="0" anchor="ctr"/>
+          <a:lstStyle/>
+          <a:p>
+            <a:pPr algn="ctr"/>
+          </a:p>
+        </p:txBody>
+      </p:sp>
+      <p:sp>
+        <p:nvSpPr>
+          <p:cNvPr id="15" name="TextBox 14"/>
+          <p:cNvSpPr txBox="1"/>
+          <p:nvPr/>
+        </p:nvSpPr>
+        <p:spPr>
+          <a:xfrm>
+            <a:off x="868680" y="4507992"/>
+            <a:ext cx="4937760" cy="1554480"/>
+          </a:xfrm>
+          <a:prstGeom prst="rect">
+            <a:avLst/>
+          </a:prstGeom>
+          <a:noFill/>
+        </p:spPr>
+        <p:txBody>
+          <a:bodyPr wrap="square" anchor="t" lIns="0" rIns="0" tIns="0" bIns="0">
+            <a:spAutoFit/>
+          </a:bodyPr>
+          <a:lstStyle/>
+          <a:p>
+            <a:pPr algn="l">
+              <a:spcAft>
+                <a:spcPts val="700"/>
+              </a:spcAft>
+            </a:pPr>
+            <a:r>
+              <a:rPr sz="1400" b="1" i="0">
+                <a:solidFill>
+                  <a:srgbClr val="A5040D"/>
+                </a:solidFill>
+                <a:latin typeface="Calibri"/>
+              </a:rPr>
+              <a:t>Product &amp; Front-End</a:t>
+            </a:r>
+          </a:p>
+          <a:p>
+            <a:pPr algn="l">
+              <a:spcAft>
+                <a:spcPts val="400"/>
+              </a:spcAft>
+            </a:pPr>
+            <a:r>
+              <a:rPr sz="1250" b="0" i="0">
+                <a:solidFill>
+                  <a:srgbClr val="1A1D21"/>
+                </a:solidFill>
+                <a:latin typeface="Calibri"/>
+              </a:rPr>
+              <a:t>•  HTML / CSS / JavaScript</a:t>
+            </a:r>
+          </a:p>
+          <a:p>
+            <a:pPr algn="l">
+              <a:spcAft>
+                <a:spcPts val="400"/>
+              </a:spcAft>
+            </a:pPr>
+            <a:r>
+              <a:rPr sz="1250" b="0" i="0">
+                <a:solidFill>
+                  <a:srgbClr val="1A1D21"/>
+                </a:solidFill>
+                <a:latin typeface="Calibri"/>
+              </a:rPr>
+              <a:t>•  SVG charting &amp; dashboards</a:t>
+            </a:r>
+          </a:p>
+          <a:p>
+            <a:pPr algn="l">
+              <a:spcAft>
+                <a:spcPts val="400"/>
+              </a:spcAft>
+            </a:pPr>
+            <a:r>
+              <a:rPr sz="1250" b="0" i="0">
+                <a:solidFill>
+                  <a:srgbClr val="1A1D21"/>
+                </a:solidFill>
+                <a:latin typeface="Calibri"/>
+              </a:rPr>
+              <a:t>•  UX for non-technical users</a:t>
+            </a:r>
+          </a:p>
+          <a:p>
+            <a:pPr algn="l">
+              <a:spcAft>
+                <a:spcPts val="400"/>
+              </a:spcAft>
+            </a:pPr>
+            <a:r>
+              <a:rPr sz="1250" b="0" i="0">
+                <a:solidFill>
+                  <a:srgbClr val="1A1D21"/>
+                </a:solidFill>
+                <a:latin typeface="Calibri"/>
+              </a:rPr>
+              <a:t>•  Clear documentation</a:t>
+            </a:r>
+          </a:p>
+        </p:txBody>
+      </p:sp>
+      <p:sp>
+        <p:nvSpPr>
+          <p:cNvPr id="16" name="Rounded Rectangle 15"/>
+          <p:cNvSpPr/>
+          <p:nvPr/>
+        </p:nvSpPr>
+        <p:spPr>
+          <a:xfrm>
+            <a:off x="6217920" y="4343400"/>
+            <a:ext cx="5349240" cy="1828800"/>
+          </a:xfrm>
+          <a:prstGeom prst="roundRect">
+            <a:avLst>
+              <a:gd name="adj" fmla="val 7000"/>
+            </a:avLst>
+          </a:prstGeom>
+          <a:solidFill>
+            <a:srgbClr val="FFFFFF"/>
+          </a:solidFill>
+          <a:ln w="9525">
+            <a:solidFill>
+              <a:srgbClr val="E2E0DA"/>
+            </a:solidFill>
+          </a:ln>
+          <a:effectLst/>
+        </p:spPr>
+        <p:style>
+          <a:lnRef idx="1">
+            <a:schemeClr val="accent1"/>
+          </a:lnRef>
+          <a:fillRef idx="3">
+            <a:schemeClr val="accent1"/>
+          </a:fillRef>
+          <a:effectRef idx="2">
+            <a:schemeClr val="accent1"/>
+          </a:effectRef>
+          <a:fontRef idx="minor">
+            <a:schemeClr val="lt1"/>
+          </a:fontRef>
+        </p:style>
+        <p:txBody>
+          <a:bodyPr rtlCol="0" anchor="ctr"/>
+          <a:lstStyle/>
+          <a:p>
+            <a:pPr algn="ctr"/>
+          </a:p>
+        </p:txBody>
+      </p:sp>
+      <p:sp>
+        <p:nvSpPr>
+          <p:cNvPr id="17" name="Rectangle 16"/>
+          <p:cNvSpPr/>
+          <p:nvPr/>
+        </p:nvSpPr>
+        <p:spPr>
+          <a:xfrm>
+            <a:off x="6217920" y="4343400"/>
+            <a:ext cx="50800" cy="1828800"/>
+          </a:xfrm>
+          <a:prstGeom prst="rect">
+            <a:avLst/>
+          </a:prstGeom>
+          <a:solidFill>
+            <a:srgbClr val="D40511"/>
+          </a:solidFill>
+          <a:ln>
+            <a:noFill/>
+          </a:ln>
+          <a:effectLst/>
+        </p:spPr>
+        <p:style>
+          <a:lnRef idx="1">
+            <a:schemeClr val="accent1"/>
+          </a:lnRef>
+          <a:fillRef idx="3">
+            <a:schemeClr val="accent1"/>
+          </a:fillRef>
+          <a:effectRef idx="2">
+            <a:schemeClr val="accent1"/>
+          </a:effectRef>
+          <a:fontRef idx="minor">
+            <a:schemeClr val="lt1"/>
+          </a:fontRef>
+        </p:style>
+        <p:txBody>
+          <a:bodyPr rtlCol="0" anchor="ctr"/>
+          <a:lstStyle/>
+          <a:p>
+            <a:pPr algn="ctr"/>
+          </a:p>
+        </p:txBody>
+      </p:sp>
+      <p:sp>
+        <p:nvSpPr>
+          <p:cNvPr id="18" name="TextBox 17"/>
+          <p:cNvSpPr txBox="1"/>
+          <p:nvPr/>
+        </p:nvSpPr>
+        <p:spPr>
+          <a:xfrm>
+            <a:off x="6446520" y="4507992"/>
+            <a:ext cx="4937760" cy="1554480"/>
+          </a:xfrm>
+          <a:prstGeom prst="rect">
+            <a:avLst/>
+          </a:prstGeom>
+          <a:noFill/>
+        </p:spPr>
+        <p:txBody>
+          <a:bodyPr wrap="square" anchor="t" lIns="0" rIns="0" tIns="0" bIns="0">
+            <a:spAutoFit/>
+          </a:bodyPr>
+          <a:lstStyle/>
+          <a:p>
+            <a:pPr algn="l">
+              <a:spcAft>
+                <a:spcPts val="700"/>
+              </a:spcAft>
+            </a:pPr>
+            <a:r>
+              <a:rPr sz="1400" b="1" i="0">
+                <a:solidFill>
+                  <a:srgbClr val="A5040D"/>
+                </a:solidFill>
+                <a:latin typeface="Calibri"/>
+              </a:rPr>
+              <a:t>Ways of Working</a:t>
+            </a:r>
+          </a:p>
+          <a:p>
+            <a:pPr algn="l">
+              <a:spcAft>
+                <a:spcPts val="400"/>
+              </a:spcAft>
+            </a:pPr>
+            <a:r>
+              <a:rPr sz="1250" b="0" i="0">
+                <a:solidFill>
+                  <a:srgbClr val="1A1D21"/>
+                </a:solidFill>
+                <a:latin typeface="Calibri"/>
+              </a:rPr>
+              <a:t>•  Reverse-engineering undocumented processes</a:t>
+            </a:r>
+          </a:p>
+          <a:p>
+            <a:pPr algn="l">
+              <a:spcAft>
+                <a:spcPts val="400"/>
+              </a:spcAft>
+            </a:pPr>
+            <a:r>
+              <a:rPr sz="1250" b="0" i="0">
+                <a:solidFill>
+                  <a:srgbClr val="1A1D21"/>
+                </a:solidFill>
+                <a:latin typeface="Calibri"/>
+              </a:rPr>
+              <a:t>•  Working from ambiguity</a:t>
+            </a:r>
+          </a:p>
+          <a:p>
+            <a:pPr algn="l">
+              <a:spcAft>
+                <a:spcPts val="400"/>
+              </a:spcAft>
+            </a:pPr>
+            <a:r>
+              <a:rPr sz="1250" b="0" i="0">
+                <a:solidFill>
+                  <a:srgbClr val="1A1D21"/>
+                </a:solidFill>
+                <a:latin typeface="Calibri"/>
+              </a:rPr>
+              <a:t>•  Production troubleshooting</a:t>
+            </a:r>
+          </a:p>
+          <a:p>
+            <a:pPr algn="l">
+              <a:spcAft>
+                <a:spcPts val="400"/>
+              </a:spcAft>
+            </a:pPr>
+            <a:r>
+              <a:rPr sz="1250" b="0" i="0">
+                <a:solidFill>
+                  <a:srgbClr val="1A1D21"/>
+                </a:solidFill>
+                <a:latin typeface="Calibri"/>
+              </a:rPr>
+              <a:t>•  Following things through to done</a:t>
+            </a:r>
+          </a:p>
+        </p:txBody>
+      </p:sp>
+      <p:sp>
+        <p:nvSpPr>
+          <p:cNvPr id="19" name="TextBox 18"/>
+          <p:cNvSpPr txBox="1"/>
+          <p:nvPr/>
+        </p:nvSpPr>
+        <p:spPr>
+          <a:xfrm>
+            <a:off x="640080" y="6537960"/>
+            <a:ext cx="8229600" cy="274320"/>
+          </a:xfrm>
+          <a:prstGeom prst="rect">
+            <a:avLst/>
+          </a:prstGeom>
+          <a:noFill/>
+        </p:spPr>
+        <p:txBody>
+          <a:bodyPr wrap="square" anchor="t" lIns="0" rIns="0" tIns="0" bIns="0">
+            <a:spAutoFit/>
+          </a:bodyPr>
+          <a:lstStyle/>
+          <a:p>
+            <a:pPr algn="l">
+              <a:spcAft>
                 <a:spcPts val="600"/>
               </a:spcAft>
             </a:pPr>
@@ -9094,7 +9167,7 @@
       </p:sp>
       <p:sp>
         <p:nvSpPr>
-          <p:cNvPr id="9" name="TextBox 8"/>
+          <p:cNvPr id="20" name="TextBox 19"/>
           <p:cNvSpPr txBox="1"/>
           <p:nvPr/>
         </p:nvSpPr>
@@ -9164,7 +9237,7 @@
             <a:avLst/>
           </a:prstGeom>
           <a:solidFill>
-            <a:srgbClr val="1A1D21"/>
+            <a:srgbClr val="F7F6F3"/>
           </a:solidFill>
           <a:ln>
             <a:noFill/>
@@ -9195,45 +9268,40 @@
       </p:sp>
       <p:sp>
         <p:nvSpPr>
-          <p:cNvPr id="3" name="Rectangle 2"/>
-          <p:cNvSpPr/>
-          <p:nvPr/>
-        </p:nvSpPr>
-        <p:spPr>
-          <a:xfrm>
-            <a:off x="0" y="0"/>
-            <a:ext cx="12191695" cy="146304"/>
-          </a:xfrm>
-          <a:prstGeom prst="rect">
-            <a:avLst/>
-          </a:prstGeom>
-          <a:solidFill>
-            <a:srgbClr val="D40511"/>
-          </a:solidFill>
-          <a:ln>
-            <a:noFill/>
-          </a:ln>
-          <a:effectLst/>
-        </p:spPr>
-        <p:style>
-          <a:lnRef idx="1">
-            <a:schemeClr val="accent1"/>
-          </a:lnRef>
-          <a:fillRef idx="3">
-            <a:schemeClr val="accent1"/>
-          </a:fillRef>
-          <a:effectRef idx="2">
-            <a:schemeClr val="accent1"/>
-          </a:effectRef>
-          <a:fontRef idx="minor">
-            <a:schemeClr val="lt1"/>
-          </a:fontRef>
-        </p:style>
-        <p:txBody>
-          <a:bodyPr rtlCol="0" anchor="ctr"/>
-          <a:lstStyle/>
-          <a:p>
-            <a:pPr algn="ctr"/>
+          <p:cNvPr id="3" name="TextBox 2"/>
+          <p:cNvSpPr txBox="1"/>
+          <p:nvPr/>
+        </p:nvSpPr>
+        <p:spPr>
+          <a:xfrm>
+            <a:off x="640080" y="457200"/>
+            <a:ext cx="10058400" cy="365760"/>
+          </a:xfrm>
+          <a:prstGeom prst="rect">
+            <a:avLst/>
+          </a:prstGeom>
+          <a:noFill/>
+        </p:spPr>
+        <p:txBody>
+          <a:bodyPr wrap="square" anchor="t" lIns="0" rIns="0" tIns="0" bIns="0">
+            <a:spAutoFit/>
+          </a:bodyPr>
+          <a:lstStyle/>
+          <a:p>
+            <a:pPr algn="l">
+              <a:spcAft>
+                <a:spcPts val="600"/>
+              </a:spcAft>
+            </a:pPr>
+            <a:r>
+              <a:rPr sz="1250" b="1" i="0">
+                <a:solidFill>
+                  <a:srgbClr val="D40511"/>
+                </a:solidFill>
+                <a:latin typeface="Calibri"/>
+              </a:rPr>
+              <a:t>WHAT I'M MOST PROUD OF</a:t>
+            </a:r>
           </a:p>
         </p:txBody>
       </p:sp>
@@ -9245,8 +9313,8 @@
         </p:nvSpPr>
         <p:spPr>
           <a:xfrm>
-            <a:off x="0" y="146304"/>
-            <a:ext cx="12191695" cy="38100"/>
+            <a:off x="640080" y="777240"/>
+            <a:ext cx="365760" cy="40640"/>
           </a:xfrm>
           <a:prstGeom prst="rect">
             <a:avLst/>
@@ -9289,8 +9357,8 @@
         </p:nvSpPr>
         <p:spPr>
           <a:xfrm>
-            <a:off x="731520" y="685800"/>
-            <a:ext cx="10058400" cy="457200"/>
+            <a:off x="640080" y="822960"/>
+            <a:ext cx="10881360" cy="914400"/>
           </a:xfrm>
           <a:prstGeom prst="rect">
             <a:avLst/>
@@ -9309,161 +9377,33 @@
               </a:spcAft>
             </a:pPr>
             <a:r>
-              <a:rPr sz="1300" b="1" i="0">
-                <a:solidFill>
-                  <a:srgbClr val="FFCC00"/>
-                </a:solidFill>
-                <a:latin typeface="Calibri"/>
-              </a:rPr>
-              <a:t>LOOKING AHEAD</a:t>
-            </a:r>
-          </a:p>
-        </p:txBody>
-      </p:sp>
-      <p:sp>
-        <p:nvSpPr>
-          <p:cNvPr id="6" name="TextBox 5"/>
-          <p:cNvSpPr txBox="1"/>
-          <p:nvPr/>
-        </p:nvSpPr>
-        <p:spPr>
-          <a:xfrm>
-            <a:off x="731520" y="1234440"/>
-            <a:ext cx="10698480" cy="914400"/>
-          </a:xfrm>
-          <a:prstGeom prst="rect">
-            <a:avLst/>
-          </a:prstGeom>
-          <a:noFill/>
-        </p:spPr>
-        <p:txBody>
-          <a:bodyPr wrap="square" anchor="t" lIns="0" rIns="0" tIns="0" bIns="0">
-            <a:spAutoFit/>
-          </a:bodyPr>
-          <a:lstStyle/>
-          <a:p>
-            <a:pPr algn="l">
-              <a:spcAft>
-                <a:spcPts val="600"/>
-              </a:spcAft>
-            </a:pPr>
-            <a:r>
-              <a:rPr sz="3000" b="1" i="0">
-                <a:solidFill>
-                  <a:srgbClr val="FFFFFF"/>
-                </a:solidFill>
-                <a:latin typeface="Calibri"/>
-              </a:rPr>
-              <a:t>I have genuinely loved being part of this team.</a:t>
-            </a:r>
-          </a:p>
-        </p:txBody>
-      </p:sp>
-      <p:sp>
-        <p:nvSpPr>
-          <p:cNvPr id="7" name="TextBox 6"/>
-          <p:cNvSpPr txBox="1"/>
-          <p:nvPr/>
-        </p:nvSpPr>
-        <p:spPr>
-          <a:xfrm>
-            <a:off x="731520" y="2468880"/>
-            <a:ext cx="10698480" cy="2926080"/>
-          </a:xfrm>
-          <a:prstGeom prst="rect">
-            <a:avLst/>
-          </a:prstGeom>
-          <a:noFill/>
-        </p:spPr>
-        <p:txBody>
-          <a:bodyPr wrap="square" anchor="t" lIns="0" rIns="0" tIns="0" bIns="0">
-            <a:spAutoFit/>
-          </a:bodyPr>
-          <a:lstStyle/>
-          <a:p>
-            <a:pPr algn="l">
-              <a:spcAft>
-                <a:spcPts val="1500"/>
-              </a:spcAft>
-            </a:pPr>
-            <a:r>
-              <a:rPr sz="1600" b="0" i="0">
-                <a:solidFill>
-                  <a:srgbClr val="E7EAED"/>
-                </a:solidFill>
-                <a:latin typeface="Calibri"/>
-              </a:rPr>
-              <a:t>•  Thank you for the trust, the patience, and the chance to work on real problems that matter to the team.</a:t>
-            </a:r>
-          </a:p>
-          <a:p>
-            <a:pPr algn="l">
-              <a:spcAft>
-                <a:spcPts val="1500"/>
-              </a:spcAft>
-            </a:pPr>
-            <a:r>
-              <a:rPr sz="1600" b="0" i="0">
-                <a:solidFill>
-                  <a:srgbClr val="E7EAED"/>
-                </a:solidFill>
-                <a:latin typeface="Calibri"/>
-              </a:rPr>
-              <a:t>•  I learned an enormous amount here, from the AR and collections side of the business to the tools that support it.</a:t>
-            </a:r>
-          </a:p>
-          <a:p>
-            <a:pPr algn="l">
-              <a:spcAft>
-                <a:spcPts val="1500"/>
-              </a:spcAft>
-            </a:pPr>
-            <a:r>
-              <a:rPr sz="1600" b="0" i="0">
-                <a:solidFill>
-                  <a:srgbClr val="E7EAED"/>
-                </a:solidFill>
-                <a:latin typeface="Calibri"/>
-              </a:rPr>
-              <a:t>•  I am proud of what we built together, and I know there is more I could contribute with more time.</a:t>
-            </a:r>
-          </a:p>
-          <a:p>
-            <a:pPr algn="l">
-              <a:spcAft>
-                <a:spcPts val="1500"/>
-              </a:spcAft>
-            </a:pPr>
-            <a:r>
-              <a:rPr sz="1600" b="0" i="0">
-                <a:solidFill>
-                  <a:srgbClr val="E7EAED"/>
-                </a:solidFill>
-                <a:latin typeface="Calibri"/>
-              </a:rPr>
-              <a:t>•  This internship confirmed my interest in finance, analytics, and automation.</a:t>
-            </a:r>
-          </a:p>
-        </p:txBody>
-      </p:sp>
-      <p:sp>
-        <p:nvSpPr>
-          <p:cNvPr id="8" name="Rounded Rectangle 7"/>
+              <a:rPr sz="2900" b="1" i="0">
+                <a:solidFill>
+                  <a:srgbClr val="1A1D21"/>
+                </a:solidFill>
+                <a:latin typeface="Calibri"/>
+              </a:rPr>
+              <a:t>A few things that meant the most to me</a:t>
+            </a:r>
+          </a:p>
+        </p:txBody>
+      </p:sp>
+      <p:sp>
+        <p:nvSpPr>
+          <p:cNvPr id="6" name="Rectangle 5"/>
           <p:cNvSpPr/>
           <p:nvPr/>
         </p:nvSpPr>
         <p:spPr>
           <a:xfrm>
-            <a:off x="731520" y="5532120"/>
-            <a:ext cx="10698480" cy="777240"/>
-          </a:xfrm>
-          <a:prstGeom prst="roundRect">
-            <a:avLst>
-              <a:gd name="adj" fmla="val 12000"/>
-            </a:avLst>
+            <a:off x="640080" y="1938528"/>
+            <a:ext cx="10881360" cy="17780"/>
+          </a:xfrm>
+          <a:prstGeom prst="rect">
+            <a:avLst/>
           </a:prstGeom>
           <a:solidFill>
-            <a:srgbClr val="D40511"/>
+            <a:srgbClr val="E2E0DA"/>
           </a:solidFill>
           <a:ln>
             <a:noFill/>
@@ -9494,14 +9434,156 @@
       </p:sp>
       <p:sp>
         <p:nvSpPr>
+          <p:cNvPr id="7" name="TextBox 6"/>
+          <p:cNvSpPr txBox="1"/>
+          <p:nvPr/>
+        </p:nvSpPr>
+        <p:spPr>
+          <a:xfrm>
+            <a:off x="640080" y="2286000"/>
+            <a:ext cx="10881360" cy="4023360"/>
+          </a:xfrm>
+          <a:prstGeom prst="rect">
+            <a:avLst/>
+          </a:prstGeom>
+          <a:noFill/>
+        </p:spPr>
+        <p:txBody>
+          <a:bodyPr wrap="square" anchor="t" lIns="0" rIns="0" tIns="0" bIns="0">
+            <a:spAutoFit/>
+          </a:bodyPr>
+          <a:lstStyle/>
+          <a:p>
+            <a:pPr algn="l">
+              <a:spcAft>
+                <a:spcPts val="1300"/>
+              </a:spcAft>
+            </a:pPr>
+            <a:r>
+              <a:rPr sz="1550" b="0" i="0">
+                <a:solidFill>
+                  <a:srgbClr val="1A1D21"/>
+                </a:solidFill>
+                <a:latin typeface="Calibri"/>
+              </a:rPr>
+              <a:t>•  Building three automation solutions that are genuinely in use, not just prototypes.</a:t>
+            </a:r>
+          </a:p>
+          <a:p>
+            <a:pPr algn="l">
+              <a:spcAft>
+                <a:spcPts val="1300"/>
+              </a:spcAft>
+            </a:pPr>
+            <a:r>
+              <a:rPr sz="1550" b="0" i="0">
+                <a:solidFill>
+                  <a:srgbClr val="1A1D21"/>
+                </a:solidFill>
+                <a:latin typeface="Calibri"/>
+              </a:rPr>
+              <a:t>•  Taking real, repetitive reporting effort off the team's plate each day.</a:t>
+            </a:r>
+          </a:p>
+          <a:p>
+            <a:pPr algn="l">
+              <a:spcAft>
+                <a:spcPts val="1300"/>
+              </a:spcAft>
+            </a:pPr>
+            <a:r>
+              <a:rPr sz="1550" b="0" i="0">
+                <a:solidFill>
+                  <a:srgbClr val="1A1D21"/>
+                </a:solidFill>
+                <a:latin typeface="Calibri"/>
+              </a:rPr>
+              <a:t>•  Creating reusable frameworks that can grow, rather than one-time fixes.</a:t>
+            </a:r>
+          </a:p>
+          <a:p>
+            <a:pPr algn="l">
+              <a:spcAft>
+                <a:spcPts val="1300"/>
+              </a:spcAft>
+            </a:pPr>
+            <a:r>
+              <a:rPr sz="1550" b="0" i="0">
+                <a:solidFill>
+                  <a:srgbClr val="1A1D21"/>
+                </a:solidFill>
+                <a:latin typeface="Calibri"/>
+              </a:rPr>
+              <a:t>•  Leaving behind solutions that keep running after the internship ends.</a:t>
+            </a:r>
+          </a:p>
+          <a:p>
+            <a:pPr algn="l">
+              <a:spcAft>
+                <a:spcPts val="1300"/>
+              </a:spcAft>
+            </a:pPr>
+            <a:r>
+              <a:rPr sz="1550" b="0" i="0">
+                <a:solidFill>
+                  <a:srgbClr val="1A1D21"/>
+                </a:solidFill>
+                <a:latin typeface="Calibri"/>
+              </a:rPr>
+              <a:t>•  Giving the team clearer visibility into AR performance and collections activity.</a:t>
+            </a:r>
+          </a:p>
+        </p:txBody>
+      </p:sp>
+      <p:sp>
+        <p:nvSpPr>
+          <p:cNvPr id="8" name="TextBox 7"/>
+          <p:cNvSpPr txBox="1"/>
+          <p:nvPr/>
+        </p:nvSpPr>
+        <p:spPr>
+          <a:xfrm>
+            <a:off x="640080" y="6537960"/>
+            <a:ext cx="8229600" cy="274320"/>
+          </a:xfrm>
+          <a:prstGeom prst="rect">
+            <a:avLst/>
+          </a:prstGeom>
+          <a:noFill/>
+        </p:spPr>
+        <p:txBody>
+          <a:bodyPr wrap="square" anchor="t" lIns="0" rIns="0" tIns="0" bIns="0">
+            <a:spAutoFit/>
+          </a:bodyPr>
+          <a:lstStyle/>
+          <a:p>
+            <a:pPr algn="l">
+              <a:spcAft>
+                <a:spcPts val="600"/>
+              </a:spcAft>
+            </a:pPr>
+            <a:r>
+              <a:rPr sz="900" b="0" i="0">
+                <a:solidFill>
+                  <a:srgbClr val="8A837B"/>
+                </a:solidFill>
+                <a:latin typeface="Calibri"/>
+              </a:rPr>
+              <a:t>AMKAD  ·  AR Reporting &amp; Collections Automation  ·  Internship Close-Out</a:t>
+            </a:r>
+          </a:p>
+        </p:txBody>
+      </p:sp>
+      <p:sp>
+        <p:nvSpPr>
           <p:cNvPr id="9" name="TextBox 8"/>
           <p:cNvSpPr txBox="1"/>
           <p:nvPr/>
         </p:nvSpPr>
         <p:spPr>
           <a:xfrm>
-            <a:off x="1005840" y="5614416"/>
-            <a:ext cx="10149840" cy="594360"/>
+            <a:off x="11247120" y="6537960"/>
+            <a:ext cx="640080" cy="274320"/>
           </a:xfrm>
           <a:prstGeom prst="rect">
             <a:avLst/>
@@ -9509,24 +9591,24 @@
           <a:noFill/>
         </p:spPr>
         <p:txBody>
-          <a:bodyPr wrap="square" anchor="ctr" lIns="0" rIns="0" tIns="0" bIns="0">
+          <a:bodyPr wrap="square" anchor="t" lIns="0" rIns="0" tIns="0" bIns="0">
             <a:spAutoFit/>
           </a:bodyPr>
           <a:lstStyle/>
           <a:p>
-            <a:pPr algn="l">
+            <a:pPr algn="r">
               <a:spcAft>
                 <a:spcPts val="600"/>
               </a:spcAft>
             </a:pPr>
             <a:r>
-              <a:rPr sz="1500" b="1" i="0">
-                <a:solidFill>
-                  <a:srgbClr val="FFFFFF"/>
-                </a:solidFill>
-                <a:latin typeface="Calibri"/>
-              </a:rPr>
-              <a:t>I am grateful for the opportunity to contribute to AMKAD, and would be excited to keep building solutions like these in the future.</a:t>
+              <a:rPr sz="900" b="0" i="0">
+                <a:solidFill>
+                  <a:srgbClr val="8A837B"/>
+                </a:solidFill>
+                <a:latin typeface="Calibri"/>
+              </a:rPr>
+              <a:t>17</a:t>
             </a:r>
           </a:p>
         </p:txBody>
@@ -9595,14 +9677,407 @@
       </p:sp>
       <p:sp>
         <p:nvSpPr>
+          <p:cNvPr id="3" name="TextBox 2"/>
+          <p:cNvSpPr txBox="1"/>
+          <p:nvPr/>
+        </p:nvSpPr>
+        <p:spPr>
+          <a:xfrm>
+            <a:off x="640080" y="457200"/>
+            <a:ext cx="10058400" cy="365760"/>
+          </a:xfrm>
+          <a:prstGeom prst="rect">
+            <a:avLst/>
+          </a:prstGeom>
+          <a:noFill/>
+        </p:spPr>
+        <p:txBody>
+          <a:bodyPr wrap="square" anchor="t" lIns="0" rIns="0" tIns="0" bIns="0">
+            <a:spAutoFit/>
+          </a:bodyPr>
+          <a:lstStyle/>
+          <a:p>
+            <a:pPr algn="l">
+              <a:spcAft>
+                <a:spcPts val="600"/>
+              </a:spcAft>
+            </a:pPr>
+            <a:r>
+              <a:rPr sz="1250" b="1" i="0">
+                <a:solidFill>
+                  <a:srgbClr val="D40511"/>
+                </a:solidFill>
+                <a:latin typeface="Calibri"/>
+              </a:rPr>
+              <a:t>WHAT'S NEXT</a:t>
+            </a:r>
+          </a:p>
+        </p:txBody>
+      </p:sp>
+      <p:sp>
+        <p:nvSpPr>
+          <p:cNvPr id="4" name="Rectangle 3"/>
+          <p:cNvSpPr/>
+          <p:nvPr/>
+        </p:nvSpPr>
+        <p:spPr>
+          <a:xfrm>
+            <a:off x="640080" y="777240"/>
+            <a:ext cx="365760" cy="40640"/>
+          </a:xfrm>
+          <a:prstGeom prst="rect">
+            <a:avLst/>
+          </a:prstGeom>
+          <a:solidFill>
+            <a:srgbClr val="FFCC00"/>
+          </a:solidFill>
+          <a:ln>
+            <a:noFill/>
+          </a:ln>
+          <a:effectLst/>
+        </p:spPr>
+        <p:style>
+          <a:lnRef idx="1">
+            <a:schemeClr val="accent1"/>
+          </a:lnRef>
+          <a:fillRef idx="3">
+            <a:schemeClr val="accent1"/>
+          </a:fillRef>
+          <a:effectRef idx="2">
+            <a:schemeClr val="accent1"/>
+          </a:effectRef>
+          <a:fontRef idx="minor">
+            <a:schemeClr val="lt1"/>
+          </a:fontRef>
+        </p:style>
+        <p:txBody>
+          <a:bodyPr rtlCol="0" anchor="ctr"/>
+          <a:lstStyle/>
+          <a:p>
+            <a:pPr algn="ctr"/>
+          </a:p>
+        </p:txBody>
+      </p:sp>
+      <p:sp>
+        <p:nvSpPr>
+          <p:cNvPr id="5" name="TextBox 4"/>
+          <p:cNvSpPr txBox="1"/>
+          <p:nvPr/>
+        </p:nvSpPr>
+        <p:spPr>
+          <a:xfrm>
+            <a:off x="640080" y="822960"/>
+            <a:ext cx="10881360" cy="914400"/>
+          </a:xfrm>
+          <a:prstGeom prst="rect">
+            <a:avLst/>
+          </a:prstGeom>
+          <a:noFill/>
+        </p:spPr>
+        <p:txBody>
+          <a:bodyPr wrap="square" anchor="t" lIns="0" rIns="0" tIns="0" bIns="0">
+            <a:spAutoFit/>
+          </a:bodyPr>
+          <a:lstStyle/>
+          <a:p>
+            <a:pPr algn="l">
+              <a:spcAft>
+                <a:spcPts val="600"/>
+              </a:spcAft>
+            </a:pPr>
+            <a:r>
+              <a:rPr sz="2900" b="1" i="0">
+                <a:solidFill>
+                  <a:srgbClr val="1A1D21"/>
+                </a:solidFill>
+                <a:latin typeface="Calibri"/>
+              </a:rPr>
+              <a:t>How this can grow from here</a:t>
+            </a:r>
+          </a:p>
+        </p:txBody>
+      </p:sp>
+      <p:sp>
+        <p:nvSpPr>
+          <p:cNvPr id="6" name="Rectangle 5"/>
+          <p:cNvSpPr/>
+          <p:nvPr/>
+        </p:nvSpPr>
+        <p:spPr>
+          <a:xfrm>
+            <a:off x="640080" y="1938528"/>
+            <a:ext cx="10881360" cy="17780"/>
+          </a:xfrm>
+          <a:prstGeom prst="rect">
+            <a:avLst/>
+          </a:prstGeom>
+          <a:solidFill>
+            <a:srgbClr val="E2E0DA"/>
+          </a:solidFill>
+          <a:ln>
+            <a:noFill/>
+          </a:ln>
+          <a:effectLst/>
+        </p:spPr>
+        <p:style>
+          <a:lnRef idx="1">
+            <a:schemeClr val="accent1"/>
+          </a:lnRef>
+          <a:fillRef idx="3">
+            <a:schemeClr val="accent1"/>
+          </a:fillRef>
+          <a:effectRef idx="2">
+            <a:schemeClr val="accent1"/>
+          </a:effectRef>
+          <a:fontRef idx="minor">
+            <a:schemeClr val="lt1"/>
+          </a:fontRef>
+        </p:style>
+        <p:txBody>
+          <a:bodyPr rtlCol="0" anchor="ctr"/>
+          <a:lstStyle/>
+          <a:p>
+            <a:pPr algn="ctr"/>
+          </a:p>
+        </p:txBody>
+      </p:sp>
+      <p:sp>
+        <p:nvSpPr>
+          <p:cNvPr id="7" name="TextBox 6"/>
+          <p:cNvSpPr txBox="1"/>
+          <p:nvPr/>
+        </p:nvSpPr>
+        <p:spPr>
+          <a:xfrm>
+            <a:off x="640080" y="2286000"/>
+            <a:ext cx="10881360" cy="4023360"/>
+          </a:xfrm>
+          <a:prstGeom prst="rect">
+            <a:avLst/>
+          </a:prstGeom>
+          <a:noFill/>
+        </p:spPr>
+        <p:txBody>
+          <a:bodyPr wrap="square" anchor="t" lIns="0" rIns="0" tIns="0" bIns="0">
+            <a:spAutoFit/>
+          </a:bodyPr>
+          <a:lstStyle/>
+          <a:p>
+            <a:pPr algn="l">
+              <a:spcAft>
+                <a:spcPts val="1300"/>
+              </a:spcAft>
+            </a:pPr>
+            <a:r>
+              <a:rPr sz="1550" b="0" i="0">
+                <a:solidFill>
+                  <a:srgbClr val="1A1D21"/>
+                </a:solidFill>
+                <a:latin typeface="Calibri"/>
+              </a:rPr>
+              <a:t>•  Extend the SOA framework to more customers and countries, since the reusable engine is already in place.</a:t>
+            </a:r>
+          </a:p>
+          <a:p>
+            <a:pPr algn="l">
+              <a:spcAft>
+                <a:spcPts val="1300"/>
+              </a:spcAft>
+            </a:pPr>
+            <a:r>
+              <a:rPr sz="1550" b="0" i="0">
+                <a:solidFill>
+                  <a:srgbClr val="1A1D21"/>
+                </a:solidFill>
+                <a:latin typeface="Calibri"/>
+              </a:rPr>
+              <a:t>•  Move the data layer toward a centralized database (SQL and Data Factory), which would be a stronger backbone for everything above.</a:t>
+            </a:r>
+          </a:p>
+          <a:p>
+            <a:pPr algn="l">
+              <a:spcAft>
+                <a:spcPts val="1300"/>
+              </a:spcAft>
+            </a:pPr>
+            <a:r>
+              <a:rPr sz="1550" b="0" i="0">
+                <a:solidFill>
+                  <a:srgbClr val="1A1D21"/>
+                </a:solidFill>
+                <a:latin typeface="Calibri"/>
+              </a:rPr>
+              <a:t>•  Build leadership-facing Power BI dashboards on top of the same consolidated data.</a:t>
+            </a:r>
+          </a:p>
+          <a:p>
+            <a:pPr algn="l">
+              <a:spcAft>
+                <a:spcPts val="1300"/>
+              </a:spcAft>
+            </a:pPr>
+            <a:r>
+              <a:rPr sz="1550" b="0" i="0">
+                <a:solidFill>
+                  <a:srgbClr val="1A1D21"/>
+                </a:solidFill>
+                <a:latin typeface="Calibri"/>
+              </a:rPr>
+              <a:t>•  Small hardening steps, like standardizing the monthly folder names and adding alerts for missing or late source files.</a:t>
+            </a:r>
+          </a:p>
+        </p:txBody>
+      </p:sp>
+      <p:sp>
+        <p:nvSpPr>
+          <p:cNvPr id="8" name="TextBox 7"/>
+          <p:cNvSpPr txBox="1"/>
+          <p:nvPr/>
+        </p:nvSpPr>
+        <p:spPr>
+          <a:xfrm>
+            <a:off x="640080" y="6537960"/>
+            <a:ext cx="8229600" cy="274320"/>
+          </a:xfrm>
+          <a:prstGeom prst="rect">
+            <a:avLst/>
+          </a:prstGeom>
+          <a:noFill/>
+        </p:spPr>
+        <p:txBody>
+          <a:bodyPr wrap="square" anchor="t" lIns="0" rIns="0" tIns="0" bIns="0">
+            <a:spAutoFit/>
+          </a:bodyPr>
+          <a:lstStyle/>
+          <a:p>
+            <a:pPr algn="l">
+              <a:spcAft>
+                <a:spcPts val="600"/>
+              </a:spcAft>
+            </a:pPr>
+            <a:r>
+              <a:rPr sz="900" b="0" i="0">
+                <a:solidFill>
+                  <a:srgbClr val="8A837B"/>
+                </a:solidFill>
+                <a:latin typeface="Calibri"/>
+              </a:rPr>
+              <a:t>AMKAD  ·  AR Reporting &amp; Collections Automation  ·  Internship Close-Out</a:t>
+            </a:r>
+          </a:p>
+        </p:txBody>
+      </p:sp>
+      <p:sp>
+        <p:nvSpPr>
+          <p:cNvPr id="9" name="TextBox 8"/>
+          <p:cNvSpPr txBox="1"/>
+          <p:nvPr/>
+        </p:nvSpPr>
+        <p:spPr>
+          <a:xfrm>
+            <a:off x="11247120" y="6537960"/>
+            <a:ext cx="640080" cy="274320"/>
+          </a:xfrm>
+          <a:prstGeom prst="rect">
+            <a:avLst/>
+          </a:prstGeom>
+          <a:noFill/>
+        </p:spPr>
+        <p:txBody>
+          <a:bodyPr wrap="square" anchor="t" lIns="0" rIns="0" tIns="0" bIns="0">
+            <a:spAutoFit/>
+          </a:bodyPr>
+          <a:lstStyle/>
+          <a:p>
+            <a:pPr algn="r">
+              <a:spcAft>
+                <a:spcPts val="600"/>
+              </a:spcAft>
+            </a:pPr>
+            <a:r>
+              <a:rPr sz="900" b="0" i="0">
+                <a:solidFill>
+                  <a:srgbClr val="8A837B"/>
+                </a:solidFill>
+                <a:latin typeface="Calibri"/>
+              </a:rPr>
+              <a:t>18</a:t>
+            </a:r>
+          </a:p>
+        </p:txBody>
+      </p:sp>
+    </p:spTree>
+  </p:cSld>
+  <p:clrMapOvr>
+    <a:masterClrMapping/>
+  </p:clrMapOvr>
+</p:sld>
+</file>
+
+<file path=ppt/slides/slide19.xml><?xml version="1.0" encoding="utf-8"?>
+<p:sld xmlns:a="http://schemas.openxmlformats.org/drawingml/2006/main" xmlns:p="http://schemas.openxmlformats.org/presentationml/2006/main" xmlns:r="http://schemas.openxmlformats.org/officeDocument/2006/relationships">
+  <p:cSld>
+    <p:spTree>
+      <p:nvGrpSpPr>
+        <p:cNvPr id="1" name=""/>
+        <p:cNvGrpSpPr/>
+        <p:nvPr/>
+      </p:nvGrpSpPr>
+      <p:grpSpPr/>
+      <p:sp>
+        <p:nvSpPr>
+          <p:cNvPr id="2" name="Rectangle 1"/>
+          <p:cNvSpPr/>
+          <p:nvPr/>
+        </p:nvSpPr>
+        <p:spPr>
+          <a:xfrm>
+            <a:off x="0" y="0"/>
+            <a:ext cx="12191695" cy="6858000"/>
+          </a:xfrm>
+          <a:prstGeom prst="rect">
+            <a:avLst/>
+          </a:prstGeom>
+          <a:solidFill>
+            <a:srgbClr val="1A1D21"/>
+          </a:solidFill>
+          <a:ln>
+            <a:noFill/>
+          </a:ln>
+          <a:effectLst/>
+        </p:spPr>
+        <p:style>
+          <a:lnRef idx="1">
+            <a:schemeClr val="accent1"/>
+          </a:lnRef>
+          <a:fillRef idx="3">
+            <a:schemeClr val="accent1"/>
+          </a:fillRef>
+          <a:effectRef idx="2">
+            <a:schemeClr val="accent1"/>
+          </a:effectRef>
+          <a:fontRef idx="minor">
+            <a:schemeClr val="lt1"/>
+          </a:fontRef>
+        </p:style>
+        <p:txBody>
+          <a:bodyPr rtlCol="0" anchor="ctr"/>
+          <a:lstStyle/>
+          <a:p>
+            <a:pPr algn="ctr"/>
+          </a:p>
+        </p:txBody>
+      </p:sp>
+      <p:sp>
+        <p:nvSpPr>
           <p:cNvPr id="3" name="Rectangle 2"/>
           <p:cNvSpPr/>
           <p:nvPr/>
         </p:nvSpPr>
         <p:spPr>
           <a:xfrm>
-            <a:off x="0" y="3200400"/>
-            <a:ext cx="12191695" cy="38100"/>
+            <a:off x="0" y="0"/>
+            <a:ext cx="12191695" cy="146304"/>
           </a:xfrm>
           <a:prstGeom prst="rect">
             <a:avLst/>
@@ -9639,138 +10114,23 @@
       </p:sp>
       <p:sp>
         <p:nvSpPr>
-          <p:cNvPr id="4" name="TextBox 3"/>
-          <p:cNvSpPr txBox="1"/>
-          <p:nvPr/>
-        </p:nvSpPr>
-        <p:spPr>
-          <a:xfrm>
-            <a:off x="731520" y="2286000"/>
-            <a:ext cx="10698480" cy="914400"/>
-          </a:xfrm>
-          <a:prstGeom prst="rect">
-            <a:avLst/>
-          </a:prstGeom>
-          <a:noFill/>
-        </p:spPr>
-        <p:txBody>
-          <a:bodyPr wrap="square" anchor="b" lIns="0" rIns="0" tIns="0" bIns="0">
-            <a:spAutoFit/>
-          </a:bodyPr>
-          <a:lstStyle/>
-          <a:p>
-            <a:pPr algn="l">
-              <a:spcAft>
-                <a:spcPts val="600"/>
-              </a:spcAft>
-            </a:pPr>
-            <a:r>
-              <a:rPr sz="4000" b="1" i="0">
-                <a:solidFill>
-                  <a:srgbClr val="1A1D21"/>
-                </a:solidFill>
-                <a:latin typeface="Calibri"/>
-              </a:rPr>
-              <a:t>Thank you</a:t>
-            </a:r>
-          </a:p>
-        </p:txBody>
-      </p:sp>
-      <p:sp>
-        <p:nvSpPr>
-          <p:cNvPr id="5" name="TextBox 4"/>
-          <p:cNvSpPr txBox="1"/>
-          <p:nvPr/>
-        </p:nvSpPr>
-        <p:spPr>
-          <a:xfrm>
-            <a:off x="731520" y="3429000"/>
-            <a:ext cx="10698480" cy="1097280"/>
-          </a:xfrm>
-          <a:prstGeom prst="rect">
-            <a:avLst/>
-          </a:prstGeom>
-          <a:noFill/>
-        </p:spPr>
-        <p:txBody>
-          <a:bodyPr wrap="square" anchor="t" lIns="0" rIns="0" tIns="0" bIns="0">
-            <a:spAutoFit/>
-          </a:bodyPr>
-          <a:lstStyle/>
-          <a:p>
-            <a:pPr algn="l">
-              <a:spcAft>
-                <a:spcPts val="300"/>
-              </a:spcAft>
-            </a:pPr>
-            <a:r>
-              <a:rPr sz="1800" b="1" i="0">
-                <a:solidFill>
-                  <a:srgbClr val="1A1D21"/>
-                </a:solidFill>
-                <a:latin typeface="Calibri"/>
-              </a:rPr>
-              <a:t>Jean Kadadihi</a:t>
-            </a:r>
-          </a:p>
-          <a:p>
-            <a:pPr algn="l">
-              <a:spcAft>
-                <a:spcPts val="200"/>
-              </a:spcAft>
-            </a:pPr>
-            <a:r>
-              <a:rPr sz="1350" b="0" i="0">
-                <a:solidFill>
-                  <a:srgbClr val="5B6470"/>
-                </a:solidFill>
-                <a:latin typeface="Calibri"/>
-              </a:rPr>
-              <a:t>Finance Intern, Controlling  ·  DHL Express Americas, Key Account Desk (AMKAD)</a:t>
-            </a:r>
-          </a:p>
-          <a:p>
-            <a:pPr algn="l">
-              <a:spcAft>
-                <a:spcPts val="600"/>
-              </a:spcAft>
-            </a:pPr>
-            <a:r>
-              <a:rPr sz="1350" b="0" i="1">
-                <a:solidFill>
-                  <a:srgbClr val="A5040D"/>
-                </a:solidFill>
-                <a:latin typeface="Calibri"/>
-              </a:rPr>
-              <a:t>I would be happy to answer any questions.</a:t>
-            </a:r>
-          </a:p>
-        </p:txBody>
-      </p:sp>
-      <p:sp>
-        <p:nvSpPr>
-          <p:cNvPr id="6" name="Rounded Rectangle 5"/>
+          <p:cNvPr id="4" name="Rectangle 3"/>
           <p:cNvSpPr/>
           <p:nvPr/>
         </p:nvSpPr>
         <p:spPr>
           <a:xfrm>
-            <a:off x="9966960" y="548640"/>
-            <a:ext cx="1737360" cy="685800"/>
-          </a:xfrm>
-          <a:prstGeom prst="roundRect">
-            <a:avLst>
-              <a:gd name="adj" fmla="val 8000"/>
-            </a:avLst>
+            <a:off x="0" y="146304"/>
+            <a:ext cx="12191695" cy="38100"/>
+          </a:xfrm>
+          <a:prstGeom prst="rect">
+            <a:avLst/>
           </a:prstGeom>
           <a:solidFill>
-            <a:srgbClr val="FFFFFF"/>
+            <a:srgbClr val="FFCC00"/>
           </a:solidFill>
-          <a:ln w="9525">
-            <a:solidFill>
-              <a:srgbClr val="8A837B"/>
-            </a:solidFill>
-            <a:prstDash val="dash"/>
+          <a:ln>
+            <a:noFill/>
           </a:ln>
           <a:effectLst/>
         </p:spPr>
@@ -9798,14 +10158,225 @@
       </p:sp>
       <p:sp>
         <p:nvSpPr>
+          <p:cNvPr id="5" name="TextBox 4"/>
+          <p:cNvSpPr txBox="1"/>
+          <p:nvPr/>
+        </p:nvSpPr>
+        <p:spPr>
+          <a:xfrm>
+            <a:off x="731520" y="685800"/>
+            <a:ext cx="10058400" cy="457200"/>
+          </a:xfrm>
+          <a:prstGeom prst="rect">
+            <a:avLst/>
+          </a:prstGeom>
+          <a:noFill/>
+        </p:spPr>
+        <p:txBody>
+          <a:bodyPr wrap="square" anchor="t" lIns="0" rIns="0" tIns="0" bIns="0">
+            <a:spAutoFit/>
+          </a:bodyPr>
+          <a:lstStyle/>
+          <a:p>
+            <a:pPr algn="l">
+              <a:spcAft>
+                <a:spcPts val="600"/>
+              </a:spcAft>
+            </a:pPr>
+            <a:r>
+              <a:rPr sz="1300" b="1" i="0">
+                <a:solidFill>
+                  <a:srgbClr val="FFCC00"/>
+                </a:solidFill>
+                <a:latin typeface="Calibri"/>
+              </a:rPr>
+              <a:t>LOOKING AHEAD</a:t>
+            </a:r>
+          </a:p>
+        </p:txBody>
+      </p:sp>
+      <p:sp>
+        <p:nvSpPr>
+          <p:cNvPr id="6" name="TextBox 5"/>
+          <p:cNvSpPr txBox="1"/>
+          <p:nvPr/>
+        </p:nvSpPr>
+        <p:spPr>
+          <a:xfrm>
+            <a:off x="731520" y="1234440"/>
+            <a:ext cx="10698480" cy="914400"/>
+          </a:xfrm>
+          <a:prstGeom prst="rect">
+            <a:avLst/>
+          </a:prstGeom>
+          <a:noFill/>
+        </p:spPr>
+        <p:txBody>
+          <a:bodyPr wrap="square" anchor="t" lIns="0" rIns="0" tIns="0" bIns="0">
+            <a:spAutoFit/>
+          </a:bodyPr>
+          <a:lstStyle/>
+          <a:p>
+            <a:pPr algn="l">
+              <a:spcAft>
+                <a:spcPts val="600"/>
+              </a:spcAft>
+            </a:pPr>
+            <a:r>
+              <a:rPr sz="3000" b="1" i="0">
+                <a:solidFill>
+                  <a:srgbClr val="FFFFFF"/>
+                </a:solidFill>
+                <a:latin typeface="Calibri"/>
+              </a:rPr>
+              <a:t>I have genuinely loved being part of this team.</a:t>
+            </a:r>
+          </a:p>
+        </p:txBody>
+      </p:sp>
+      <p:sp>
+        <p:nvSpPr>
           <p:cNvPr id="7" name="TextBox 6"/>
           <p:cNvSpPr txBox="1"/>
           <p:nvPr/>
         </p:nvSpPr>
         <p:spPr>
           <a:xfrm>
-            <a:off x="9966960" y="548640"/>
-            <a:ext cx="1737360" cy="685800"/>
+            <a:off x="731520" y="2468880"/>
+            <a:ext cx="10698480" cy="2926080"/>
+          </a:xfrm>
+          <a:prstGeom prst="rect">
+            <a:avLst/>
+          </a:prstGeom>
+          <a:noFill/>
+        </p:spPr>
+        <p:txBody>
+          <a:bodyPr wrap="square" anchor="t" lIns="0" rIns="0" tIns="0" bIns="0">
+            <a:spAutoFit/>
+          </a:bodyPr>
+          <a:lstStyle/>
+          <a:p>
+            <a:pPr algn="l">
+              <a:spcAft>
+                <a:spcPts val="1500"/>
+              </a:spcAft>
+            </a:pPr>
+            <a:r>
+              <a:rPr sz="1600" b="0" i="0">
+                <a:solidFill>
+                  <a:srgbClr val="E7EAED"/>
+                </a:solidFill>
+                <a:latin typeface="Calibri"/>
+              </a:rPr>
+              <a:t>•  Thank you for the trust, the patience, and the chance to work on real problems that matter to the team.</a:t>
+            </a:r>
+          </a:p>
+          <a:p>
+            <a:pPr algn="l">
+              <a:spcAft>
+                <a:spcPts val="1500"/>
+              </a:spcAft>
+            </a:pPr>
+            <a:r>
+              <a:rPr sz="1600" b="0" i="0">
+                <a:solidFill>
+                  <a:srgbClr val="E7EAED"/>
+                </a:solidFill>
+                <a:latin typeface="Calibri"/>
+              </a:rPr>
+              <a:t>•  I learned an enormous amount here, from the AR and collections side of the business to the tools that support it.</a:t>
+            </a:r>
+          </a:p>
+          <a:p>
+            <a:pPr algn="l">
+              <a:spcAft>
+                <a:spcPts val="1500"/>
+              </a:spcAft>
+            </a:pPr>
+            <a:r>
+              <a:rPr sz="1600" b="0" i="0">
+                <a:solidFill>
+                  <a:srgbClr val="E7EAED"/>
+                </a:solidFill>
+                <a:latin typeface="Calibri"/>
+              </a:rPr>
+              <a:t>•  I am proud of what we built together, and I know there is more I could contribute with more time.</a:t>
+            </a:r>
+          </a:p>
+          <a:p>
+            <a:pPr algn="l">
+              <a:spcAft>
+                <a:spcPts val="1500"/>
+              </a:spcAft>
+            </a:pPr>
+            <a:r>
+              <a:rPr sz="1600" b="0" i="0">
+                <a:solidFill>
+                  <a:srgbClr val="E7EAED"/>
+                </a:solidFill>
+                <a:latin typeface="Calibri"/>
+              </a:rPr>
+              <a:t>•  This internship confirmed my interest in finance, analytics, and automation.</a:t>
+            </a:r>
+          </a:p>
+        </p:txBody>
+      </p:sp>
+      <p:sp>
+        <p:nvSpPr>
+          <p:cNvPr id="8" name="Rounded Rectangle 7"/>
+          <p:cNvSpPr/>
+          <p:nvPr/>
+        </p:nvSpPr>
+        <p:spPr>
+          <a:xfrm>
+            <a:off x="731520" y="5532120"/>
+            <a:ext cx="10698480" cy="777240"/>
+          </a:xfrm>
+          <a:prstGeom prst="roundRect">
+            <a:avLst>
+              <a:gd name="adj" fmla="val 12000"/>
+            </a:avLst>
+          </a:prstGeom>
+          <a:solidFill>
+            <a:srgbClr val="D40511"/>
+          </a:solidFill>
+          <a:ln>
+            <a:noFill/>
+          </a:ln>
+          <a:effectLst/>
+        </p:spPr>
+        <p:style>
+          <a:lnRef idx="1">
+            <a:schemeClr val="accent1"/>
+          </a:lnRef>
+          <a:fillRef idx="3">
+            <a:schemeClr val="accent1"/>
+          </a:fillRef>
+          <a:effectRef idx="2">
+            <a:schemeClr val="accent1"/>
+          </a:effectRef>
+          <a:fontRef idx="minor">
+            <a:schemeClr val="lt1"/>
+          </a:fontRef>
+        </p:style>
+        <p:txBody>
+          <a:bodyPr rtlCol="0" anchor="ctr"/>
+          <a:lstStyle/>
+          <a:p>
+            <a:pPr algn="ctr"/>
+          </a:p>
+        </p:txBody>
+      </p:sp>
+      <p:sp>
+        <p:nvSpPr>
+          <p:cNvPr id="9" name="TextBox 8"/>
+          <p:cNvSpPr txBox="1"/>
+          <p:nvPr/>
+        </p:nvSpPr>
+        <p:spPr>
+          <a:xfrm>
+            <a:off x="1005840" y="5614416"/>
+            <a:ext cx="10149840" cy="594360"/>
           </a:xfrm>
           <a:prstGeom prst="rect">
             <a:avLst/>
@@ -9818,19 +10389,19 @@
           </a:bodyPr>
           <a:lstStyle/>
           <a:p>
-            <a:pPr algn="ctr">
+            <a:pPr algn="l">
               <a:spcAft>
                 <a:spcPts val="600"/>
               </a:spcAft>
             </a:pPr>
             <a:r>
-              <a:rPr sz="900" b="0" i="1">
-                <a:solidFill>
-                  <a:srgbClr val="8A837B"/>
-                </a:solidFill>
-                <a:latin typeface="Calibri"/>
-              </a:rPr>
-              <a:t>paste DHL logo</a:t>
+              <a:rPr sz="1500" b="1" i="0">
+                <a:solidFill>
+                  <a:srgbClr val="FFFFFF"/>
+                </a:solidFill>
+                <a:latin typeface="Calibri"/>
+              </a:rPr>
+              <a:t>I am grateful for the opportunity to contribute to AMKAD, and would be excited to keep building solutions like these in the future.</a:t>
             </a:r>
           </a:p>
         </p:txBody>
@@ -10688,6 +11259,310 @@
                 <a:latin typeface="Calibri"/>
               </a:rPr>
               <a:t>2</a:t>
+            </a:r>
+          </a:p>
+        </p:txBody>
+      </p:sp>
+    </p:spTree>
+  </p:cSld>
+  <p:clrMapOvr>
+    <a:masterClrMapping/>
+  </p:clrMapOvr>
+</p:sld>
+</file>
+
+<file path=ppt/slides/slide20.xml><?xml version="1.0" encoding="utf-8"?>
+<p:sld xmlns:a="http://schemas.openxmlformats.org/drawingml/2006/main" xmlns:p="http://schemas.openxmlformats.org/presentationml/2006/main" xmlns:r="http://schemas.openxmlformats.org/officeDocument/2006/relationships">
+  <p:cSld>
+    <p:spTree>
+      <p:nvGrpSpPr>
+        <p:cNvPr id="1" name=""/>
+        <p:cNvGrpSpPr/>
+        <p:nvPr/>
+      </p:nvGrpSpPr>
+      <p:grpSpPr/>
+      <p:sp>
+        <p:nvSpPr>
+          <p:cNvPr id="2" name="Rectangle 1"/>
+          <p:cNvSpPr/>
+          <p:nvPr/>
+        </p:nvSpPr>
+        <p:spPr>
+          <a:xfrm>
+            <a:off x="0" y="0"/>
+            <a:ext cx="12191695" cy="6858000"/>
+          </a:xfrm>
+          <a:prstGeom prst="rect">
+            <a:avLst/>
+          </a:prstGeom>
+          <a:solidFill>
+            <a:srgbClr val="F7F6F3"/>
+          </a:solidFill>
+          <a:ln>
+            <a:noFill/>
+          </a:ln>
+          <a:effectLst/>
+        </p:spPr>
+        <p:style>
+          <a:lnRef idx="1">
+            <a:schemeClr val="accent1"/>
+          </a:lnRef>
+          <a:fillRef idx="3">
+            <a:schemeClr val="accent1"/>
+          </a:fillRef>
+          <a:effectRef idx="2">
+            <a:schemeClr val="accent1"/>
+          </a:effectRef>
+          <a:fontRef idx="minor">
+            <a:schemeClr val="lt1"/>
+          </a:fontRef>
+        </p:style>
+        <p:txBody>
+          <a:bodyPr rtlCol="0" anchor="ctr"/>
+          <a:lstStyle/>
+          <a:p>
+            <a:pPr algn="ctr"/>
+          </a:p>
+        </p:txBody>
+      </p:sp>
+      <p:sp>
+        <p:nvSpPr>
+          <p:cNvPr id="3" name="Rectangle 2"/>
+          <p:cNvSpPr/>
+          <p:nvPr/>
+        </p:nvSpPr>
+        <p:spPr>
+          <a:xfrm>
+            <a:off x="0" y="3200400"/>
+            <a:ext cx="12191695" cy="38100"/>
+          </a:xfrm>
+          <a:prstGeom prst="rect">
+            <a:avLst/>
+          </a:prstGeom>
+          <a:solidFill>
+            <a:srgbClr val="D40511"/>
+          </a:solidFill>
+          <a:ln>
+            <a:noFill/>
+          </a:ln>
+          <a:effectLst/>
+        </p:spPr>
+        <p:style>
+          <a:lnRef idx="1">
+            <a:schemeClr val="accent1"/>
+          </a:lnRef>
+          <a:fillRef idx="3">
+            <a:schemeClr val="accent1"/>
+          </a:fillRef>
+          <a:effectRef idx="2">
+            <a:schemeClr val="accent1"/>
+          </a:effectRef>
+          <a:fontRef idx="minor">
+            <a:schemeClr val="lt1"/>
+          </a:fontRef>
+        </p:style>
+        <p:txBody>
+          <a:bodyPr rtlCol="0" anchor="ctr"/>
+          <a:lstStyle/>
+          <a:p>
+            <a:pPr algn="ctr"/>
+          </a:p>
+        </p:txBody>
+      </p:sp>
+      <p:sp>
+        <p:nvSpPr>
+          <p:cNvPr id="4" name="TextBox 3"/>
+          <p:cNvSpPr txBox="1"/>
+          <p:nvPr/>
+        </p:nvSpPr>
+        <p:spPr>
+          <a:xfrm>
+            <a:off x="731520" y="2286000"/>
+            <a:ext cx="10698480" cy="914400"/>
+          </a:xfrm>
+          <a:prstGeom prst="rect">
+            <a:avLst/>
+          </a:prstGeom>
+          <a:noFill/>
+        </p:spPr>
+        <p:txBody>
+          <a:bodyPr wrap="square" anchor="b" lIns="0" rIns="0" tIns="0" bIns="0">
+            <a:spAutoFit/>
+          </a:bodyPr>
+          <a:lstStyle/>
+          <a:p>
+            <a:pPr algn="l">
+              <a:spcAft>
+                <a:spcPts val="600"/>
+              </a:spcAft>
+            </a:pPr>
+            <a:r>
+              <a:rPr sz="4000" b="1" i="0">
+                <a:solidFill>
+                  <a:srgbClr val="1A1D21"/>
+                </a:solidFill>
+                <a:latin typeface="Calibri"/>
+              </a:rPr>
+              <a:t>Thank you</a:t>
+            </a:r>
+          </a:p>
+        </p:txBody>
+      </p:sp>
+      <p:sp>
+        <p:nvSpPr>
+          <p:cNvPr id="5" name="TextBox 4"/>
+          <p:cNvSpPr txBox="1"/>
+          <p:nvPr/>
+        </p:nvSpPr>
+        <p:spPr>
+          <a:xfrm>
+            <a:off x="731520" y="3429000"/>
+            <a:ext cx="10698480" cy="1097280"/>
+          </a:xfrm>
+          <a:prstGeom prst="rect">
+            <a:avLst/>
+          </a:prstGeom>
+          <a:noFill/>
+        </p:spPr>
+        <p:txBody>
+          <a:bodyPr wrap="square" anchor="t" lIns="0" rIns="0" tIns="0" bIns="0">
+            <a:spAutoFit/>
+          </a:bodyPr>
+          <a:lstStyle/>
+          <a:p>
+            <a:pPr algn="l">
+              <a:spcAft>
+                <a:spcPts val="300"/>
+              </a:spcAft>
+            </a:pPr>
+            <a:r>
+              <a:rPr sz="1800" b="1" i="0">
+                <a:solidFill>
+                  <a:srgbClr val="1A1D21"/>
+                </a:solidFill>
+                <a:latin typeface="Calibri"/>
+              </a:rPr>
+              <a:t>Jean Kadadihi</a:t>
+            </a:r>
+          </a:p>
+          <a:p>
+            <a:pPr algn="l">
+              <a:spcAft>
+                <a:spcPts val="200"/>
+              </a:spcAft>
+            </a:pPr>
+            <a:r>
+              <a:rPr sz="1350" b="0" i="0">
+                <a:solidFill>
+                  <a:srgbClr val="5B6470"/>
+                </a:solidFill>
+                <a:latin typeface="Calibri"/>
+              </a:rPr>
+              <a:t>Finance Intern, Controlling  ·  DHL Express Americas, Key Account Desk (AMKAD)</a:t>
+            </a:r>
+          </a:p>
+          <a:p>
+            <a:pPr algn="l">
+              <a:spcAft>
+                <a:spcPts val="600"/>
+              </a:spcAft>
+            </a:pPr>
+            <a:r>
+              <a:rPr sz="1350" b="0" i="1">
+                <a:solidFill>
+                  <a:srgbClr val="A5040D"/>
+                </a:solidFill>
+                <a:latin typeface="Calibri"/>
+              </a:rPr>
+              <a:t>I would be happy to answer any questions.</a:t>
+            </a:r>
+          </a:p>
+        </p:txBody>
+      </p:sp>
+      <p:sp>
+        <p:nvSpPr>
+          <p:cNvPr id="6" name="Rounded Rectangle 5"/>
+          <p:cNvSpPr/>
+          <p:nvPr/>
+        </p:nvSpPr>
+        <p:spPr>
+          <a:xfrm>
+            <a:off x="9966960" y="548640"/>
+            <a:ext cx="1737360" cy="685800"/>
+          </a:xfrm>
+          <a:prstGeom prst="roundRect">
+            <a:avLst>
+              <a:gd name="adj" fmla="val 8000"/>
+            </a:avLst>
+          </a:prstGeom>
+          <a:solidFill>
+            <a:srgbClr val="FFFFFF"/>
+          </a:solidFill>
+          <a:ln w="9525">
+            <a:solidFill>
+              <a:srgbClr val="8A837B"/>
+            </a:solidFill>
+            <a:prstDash val="dash"/>
+          </a:ln>
+          <a:effectLst/>
+        </p:spPr>
+        <p:style>
+          <a:lnRef idx="1">
+            <a:schemeClr val="accent1"/>
+          </a:lnRef>
+          <a:fillRef idx="3">
+            <a:schemeClr val="accent1"/>
+          </a:fillRef>
+          <a:effectRef idx="2">
+            <a:schemeClr val="accent1"/>
+          </a:effectRef>
+          <a:fontRef idx="minor">
+            <a:schemeClr val="lt1"/>
+          </a:fontRef>
+        </p:style>
+        <p:txBody>
+          <a:bodyPr rtlCol="0" anchor="ctr"/>
+          <a:lstStyle/>
+          <a:p>
+            <a:pPr algn="ctr"/>
+          </a:p>
+        </p:txBody>
+      </p:sp>
+      <p:sp>
+        <p:nvSpPr>
+          <p:cNvPr id="7" name="TextBox 6"/>
+          <p:cNvSpPr txBox="1"/>
+          <p:nvPr/>
+        </p:nvSpPr>
+        <p:spPr>
+          <a:xfrm>
+            <a:off x="9966960" y="548640"/>
+            <a:ext cx="1737360" cy="685800"/>
+          </a:xfrm>
+          <a:prstGeom prst="rect">
+            <a:avLst/>
+          </a:prstGeom>
+          <a:noFill/>
+        </p:spPr>
+        <p:txBody>
+          <a:bodyPr wrap="square" anchor="ctr" lIns="0" rIns="0" tIns="0" bIns="0">
+            <a:spAutoFit/>
+          </a:bodyPr>
+          <a:lstStyle/>
+          <a:p>
+            <a:pPr algn="ctr">
+              <a:spcAft>
+                <a:spcPts val="600"/>
+              </a:spcAft>
+            </a:pPr>
+            <a:r>
+              <a:rPr sz="900" b="0" i="1">
+                <a:solidFill>
+                  <a:srgbClr val="8A837B"/>
+                </a:solidFill>
+                <a:latin typeface="Calibri"/>
+              </a:rPr>
+              <a:t>paste DHL logo</a:t>
             </a:r>
           </a:p>
         </p:txBody>

--- a/docs/AMKAD_Internship_Presentation.pptx
+++ b/docs/AMKAD_Internship_Presentation.pptx
@@ -3738,7 +3738,7 @@
                 </a:solidFill>
                 <a:latin typeface="Calibri"/>
               </a:rPr>
-              <a:t>•  Automated 6 recurring weekly Statements of Account: Arrow Electronics across 5 countries, and Baker Hughes.</a:t>
+              <a:t>•  Automated 12 recurring weekly Statements of Account across multiple customers and countries.</a:t>
             </a:r>
           </a:p>
           <a:p>
@@ -3873,7 +3873,7 @@
                 </a:solidFill>
                 <a:latin typeface="Calibri"/>
               </a:rPr>
-              <a:t>To be clear on scope: two customers are live today, six SOAs a week, on a framework built so more can be added over time. The reusable engine is the part that is done.</a:t>
+              <a:t>12 SOAs a week are live today, on a framework built so more can be added over time. The reusable engine is the part that is done.</a:t>
             </a:r>
           </a:p>
         </p:txBody>
@@ -4266,7 +4266,7 @@
                 </a:solidFill>
                 <a:latin typeface="Calibri"/>
               </a:rPr>
-              <a:t>Live today:   ✓ Dashboard in production    ✓ Daily pipeline running    ✓ 6 weekly SOAs automated    ✓ Framework ready for more customers</a:t>
+              <a:t>Live today:   ✓ Dashboard in production    ✓ Daily pipeline running    ✓ 12 weekly SOAs automated    ✓ Framework ready for more customers</a:t>
             </a:r>
           </a:p>
         </p:txBody>
@@ -4955,7 +4955,7 @@
                 </a:solidFill>
                 <a:latin typeface="Calibri"/>
               </a:rPr>
-              <a:t>SOA automation  (6 SOAs × 30–60 min)</a:t>
+              <a:t>SOA automation  (12 SOAs × 30 min)</a:t>
             </a:r>
           </a:p>
         </p:txBody>
@@ -4994,7 +4994,7 @@
                 </a:solidFill>
                 <a:latin typeface="Calibri"/>
               </a:rPr>
-              <a:t>3–6 hrs</a:t>
+              <a:t>6 hrs</a:t>
             </a:r>
           </a:p>
         </p:txBody>
@@ -5033,7 +5033,7 @@
                 </a:solidFill>
                 <a:latin typeface="Calibri"/>
               </a:rPr>
-              <a:t>13–26 hrs</a:t>
+              <a:t>~26 hrs</a:t>
             </a:r>
           </a:p>
         </p:txBody>
@@ -5072,7 +5072,7 @@
                 </a:solidFill>
                 <a:latin typeface="Calibri"/>
               </a:rPr>
-              <a:t>150–300 hrs</a:t>
+              <a:t>~300 hrs</a:t>
             </a:r>
           </a:p>
         </p:txBody>
@@ -5240,7 +5240,7 @@
                 </a:solidFill>
                 <a:latin typeface="Calibri"/>
               </a:rPr>
-              <a:t>~5.5–9 hrs</a:t>
+              <a:t>~8.5–9 hrs</a:t>
             </a:r>
           </a:p>
         </p:txBody>
@@ -5279,7 +5279,7 @@
                 </a:solidFill>
                 <a:latin typeface="Calibri"/>
               </a:rPr>
-              <a:t>~24–38 hrs</a:t>
+              <a:t>~36–38 hrs</a:t>
             </a:r>
           </a:p>
         </p:txBody>
@@ -5318,7 +5318,7 @@
                 </a:solidFill>
                 <a:latin typeface="Calibri"/>
               </a:rPr>
-              <a:t>~275–445 hrs</a:t>
+              <a:t>~425–445 hrs</a:t>
             </a:r>
           </a:p>
         </p:txBody>
@@ -5357,7 +5357,7 @@
                 </a:solidFill>
                 <a:latin typeface="Calibri"/>
               </a:rPr>
-              <a:t>That comes to roughly 7 to 11 full work-weeks of time given back to the team each year.</a:t>
+              <a:t>That comes to roughly 11 full work-weeks of time given back to the team each year.</a:t>
             </a:r>
           </a:p>
           <a:p>
@@ -5373,7 +5373,7 @@
                 </a:solidFill>
                 <a:latin typeface="Calibri"/>
               </a:rPr>
-              <a:t>The assumptions are kept conservative on purpose: 5 business days a week, SOAs at 30 to 60 minutes each, 6 a week. The figures leave out error-correction, rework, and analysis time, so the real number is likely higher.</a:t>
+              <a:t>The assumptions are kept conservative on purpose: 5 business days a week, 12 SOAs a week at about 30 minutes each. The figures leave out error-correction, rework, and analysis time, so the real number is likely higher.</a:t>
             </a:r>
           </a:p>
         </p:txBody>
@@ -10760,7 +10760,7 @@
                 </a:solidFill>
                 <a:latin typeface="Calibri"/>
               </a:rPr>
-              <a:t>~275 hrs</a:t>
+              <a:t>~425 hrs</a:t>
             </a:r>
           </a:p>
           <a:p>
@@ -10776,7 +10776,7 @@
                 </a:solidFill>
                 <a:latin typeface="Calibri"/>
               </a:rPr>
-              <a:t>of team time given back each year, and likely more. A conservative estimate.</a:t>
+              <a:t>of team time given back each year, up to ~445. A conservative estimate.</a:t>
             </a:r>
           </a:p>
         </p:txBody>
@@ -10907,7 +10907,7 @@
                 </a:solidFill>
                 <a:latin typeface="Calibri"/>
               </a:rPr>
-              <a:t>6 / week</a:t>
+              <a:t>12 / week</a:t>
             </a:r>
           </a:p>
           <a:p>
@@ -10923,7 +10923,7 @@
                 </a:solidFill>
                 <a:latin typeface="Calibri"/>
               </a:rPr>
-              <a:t>statements now generated and emailed automatically (Arrow ×5, Baker ×1)</a:t>
+              <a:t>statements now generated and emailed automatically each week</a:t>
             </a:r>
           </a:p>
         </p:txBody>
@@ -11109,7 +11109,7 @@
                 </a:solidFill>
                 <a:latin typeface="Calibri"/>
               </a:rPr>
-              <a:t>That is roughly 7 to 11 full work-weeks a year that collectors can spend on collections instead of manual reporting.</a:t>
+              <a:t>That is roughly 11 full work-weeks a year that collectors can spend on collections instead of manual reporting.</a:t>
             </a:r>
           </a:p>
         </p:txBody>
